--- a/public/assets/ppt/IGT_AI_Tutoriales/Traducción SlicerIGT-U12_LandmarkRegistration.pptx
+++ b/public/assets/ppt/IGT_AI_Tutoriales/Traducción SlicerIGT-U12_LandmarkRegistration.pptx
@@ -5,7 +5,7 @@
     <p:sldMasterId id="2147483660" r:id="rId4"/>
   </p:sldMasterIdLst>
   <p:notesMasterIdLst>
-    <p:notesMasterId r:id="rId18"/>
+    <p:notesMasterId r:id="rId17"/>
   </p:notesMasterIdLst>
   <p:sldIdLst>
     <p:sldId id="256" r:id="rId5"/>
@@ -18,9 +18,8 @@
     <p:sldId id="260" r:id="rId12"/>
     <p:sldId id="261" r:id="rId13"/>
     <p:sldId id="262" r:id="rId14"/>
-    <p:sldId id="263" r:id="rId15"/>
-    <p:sldId id="264" r:id="rId16"/>
-    <p:sldId id="265" r:id="rId17"/>
+    <p:sldId id="264" r:id="rId15"/>
+    <p:sldId id="265" r:id="rId16"/>
   </p:sldIdLst>
   <p:sldSz cx="9144000" cy="6858000" type="screen4x3"/>
   <p:notesSz cx="6858000" cy="9144000"/>
@@ -119,365 +118,15 @@
       </a:defRPr>
     </a:lvl9pPr>
   </p:defaultTextStyle>
-  <p:extLst>
-    <p:ext uri="{EFAFB233-063F-42B5-8137-9DF3F51BA10A}">
-      <p15:sldGuideLst xmlns:p15="http://schemas.microsoft.com/office/powerpoint/2012/main"/>
-    </p:ext>
-  </p:extLst>
 </p:presentation>
 </file>
 
 <file path=ppt/revisionInfo.xml><?xml version="1.0" encoding="utf-8"?>
 <p1510:revInfo xmlns:a="http://schemas.openxmlformats.org/drawingml/2006/main" xmlns:r="http://schemas.openxmlformats.org/officeDocument/2006/relationships" xmlns:p1510="http://schemas.microsoft.com/office/powerpoint/2015/10/main">
   <p1510:revLst>
-    <p1510:client id="{EB6DF680-2C9C-BF9B-A9FC-88C426045E71}" v="187" dt="2025-11-18T05:54:38.326"/>
+    <p1510:client id="{C44F351D-CC79-6B12-3E47-CA70A94A75DD}" v="34" dt="2026-04-30T16:37:29.809"/>
   </p1510:revLst>
 </p1510:revInfo>
-</file>
-
-<file path=ppt/changesInfos/changesInfo1.xml><?xml version="1.0" encoding="utf-8"?>
-<pc:chgInfo xmlns:a="http://schemas.openxmlformats.org/drawingml/2006/main" xmlns:r="http://schemas.openxmlformats.org/officeDocument/2006/relationships" xmlns:ac="http://schemas.microsoft.com/office/drawing/2013/main/command" xmlns:pc="http://schemas.microsoft.com/office/powerpoint/2013/main/command">
-  <pc:docChgLst>
-    <pc:chgData name="Monserrat Rios Hernandez" userId="S::mriosh623@alumno.uaemex.mx::32caf045-7843-489a-8d2f-5338e2accd11" providerId="AD" clId="Web-{EB6DF680-2C9C-BF9B-A9FC-88C426045E71}"/>
-    <pc:docChg chg="modSld">
-      <pc:chgData name="Monserrat Rios Hernandez" userId="S::mriosh623@alumno.uaemex.mx::32caf045-7843-489a-8d2f-5338e2accd11" providerId="AD" clId="Web-{EB6DF680-2C9C-BF9B-A9FC-88C426045E71}" dt="2025-11-18T05:54:38.326" v="190" actId="1076"/>
-      <pc:docMkLst>
-        <pc:docMk/>
-      </pc:docMkLst>
-      <pc:sldChg chg="addSp delSp modSp">
-        <pc:chgData name="Monserrat Rios Hernandez" userId="S::mriosh623@alumno.uaemex.mx::32caf045-7843-489a-8d2f-5338e2accd11" providerId="AD" clId="Web-{EB6DF680-2C9C-BF9B-A9FC-88C426045E71}" dt="2025-11-18T05:35:55.973" v="105" actId="1076"/>
-        <pc:sldMkLst>
-          <pc:docMk/>
-          <pc:sldMk cId="3211149521" sldId="258"/>
-        </pc:sldMkLst>
-        <pc:spChg chg="mod">
-          <ac:chgData name="Monserrat Rios Hernandez" userId="S::mriosh623@alumno.uaemex.mx::32caf045-7843-489a-8d2f-5338e2accd11" providerId="AD" clId="Web-{EB6DF680-2C9C-BF9B-A9FC-88C426045E71}" dt="2025-11-18T05:32:18.798" v="42" actId="20577"/>
-          <ac:spMkLst>
-            <pc:docMk/>
-            <pc:sldMk cId="3211149521" sldId="258"/>
-            <ac:spMk id="3" creationId="{00000000-0000-0000-0000-000000000000}"/>
-          </ac:spMkLst>
-        </pc:spChg>
-        <pc:spChg chg="mod">
-          <ac:chgData name="Monserrat Rios Hernandez" userId="S::mriosh623@alumno.uaemex.mx::32caf045-7843-489a-8d2f-5338e2accd11" providerId="AD" clId="Web-{EB6DF680-2C9C-BF9B-A9FC-88C426045E71}" dt="2025-11-18T05:35:51.613" v="103" actId="1076"/>
-          <ac:spMkLst>
-            <pc:docMk/>
-            <pc:sldMk cId="3211149521" sldId="258"/>
-            <ac:spMk id="7" creationId="{00000000-0000-0000-0000-000000000000}"/>
-          </ac:spMkLst>
-        </pc:spChg>
-        <pc:spChg chg="mod">
-          <ac:chgData name="Monserrat Rios Hernandez" userId="S::mriosh623@alumno.uaemex.mx::32caf045-7843-489a-8d2f-5338e2accd11" providerId="AD" clId="Web-{EB6DF680-2C9C-BF9B-A9FC-88C426045E71}" dt="2025-11-18T05:35:53.910" v="104" actId="1076"/>
-          <ac:spMkLst>
-            <pc:docMk/>
-            <pc:sldMk cId="3211149521" sldId="258"/>
-            <ac:spMk id="8" creationId="{00000000-0000-0000-0000-000000000000}"/>
-          </ac:spMkLst>
-        </pc:spChg>
-        <pc:spChg chg="mod">
-          <ac:chgData name="Monserrat Rios Hernandez" userId="S::mriosh623@alumno.uaemex.mx::32caf045-7843-489a-8d2f-5338e2accd11" providerId="AD" clId="Web-{EB6DF680-2C9C-BF9B-A9FC-88C426045E71}" dt="2025-11-18T05:35:55.973" v="105" actId="1076"/>
-          <ac:spMkLst>
-            <pc:docMk/>
-            <pc:sldMk cId="3211149521" sldId="258"/>
-            <ac:spMk id="9" creationId="{00000000-0000-0000-0000-000000000000}"/>
-          </ac:spMkLst>
-        </pc:spChg>
-        <pc:picChg chg="add del">
-          <ac:chgData name="Monserrat Rios Hernandez" userId="S::mriosh623@alumno.uaemex.mx::32caf045-7843-489a-8d2f-5338e2accd11" providerId="AD" clId="Web-{EB6DF680-2C9C-BF9B-A9FC-88C426045E71}" dt="2025-11-18T05:35:20.628" v="99"/>
-          <ac:picMkLst>
-            <pc:docMk/>
-            <pc:sldMk cId="3211149521" sldId="258"/>
-            <ac:picMk id="5" creationId="{00000000-0000-0000-0000-000000000000}"/>
-          </ac:picMkLst>
-        </pc:picChg>
-        <pc:picChg chg="add del mod">
-          <ac:chgData name="Monserrat Rios Hernandez" userId="S::mriosh623@alumno.uaemex.mx::32caf045-7843-489a-8d2f-5338e2accd11" providerId="AD" clId="Web-{EB6DF680-2C9C-BF9B-A9FC-88C426045E71}" dt="2025-11-18T05:34:30.675" v="87"/>
-          <ac:picMkLst>
-            <pc:docMk/>
-            <pc:sldMk cId="3211149521" sldId="258"/>
-            <ac:picMk id="10" creationId="{1EC366FD-68E4-6B5C-2B11-340451DCC46A}"/>
-          </ac:picMkLst>
-        </pc:picChg>
-        <pc:picChg chg="add mod ord">
-          <ac:chgData name="Monserrat Rios Hernandez" userId="S::mriosh623@alumno.uaemex.mx::32caf045-7843-489a-8d2f-5338e2accd11" providerId="AD" clId="Web-{EB6DF680-2C9C-BF9B-A9FC-88C426045E71}" dt="2025-11-18T05:35:46.379" v="102" actId="1076"/>
-          <ac:picMkLst>
-            <pc:docMk/>
-            <pc:sldMk cId="3211149521" sldId="258"/>
-            <ac:picMk id="11" creationId="{0B3E1D55-9150-95C2-92DF-5C601652D401}"/>
-          </ac:picMkLst>
-        </pc:picChg>
-      </pc:sldChg>
-      <pc:sldChg chg="addSp delSp modSp">
-        <pc:chgData name="Monserrat Rios Hernandez" userId="S::mriosh623@alumno.uaemex.mx::32caf045-7843-489a-8d2f-5338e2accd11" providerId="AD" clId="Web-{EB6DF680-2C9C-BF9B-A9FC-88C426045E71}" dt="2025-11-18T05:36:52.958" v="112" actId="1076"/>
-        <pc:sldMkLst>
-          <pc:docMk/>
-          <pc:sldMk cId="2863644347" sldId="259"/>
-        </pc:sldMkLst>
-        <pc:spChg chg="mod">
-          <ac:chgData name="Monserrat Rios Hernandez" userId="S::mriosh623@alumno.uaemex.mx::32caf045-7843-489a-8d2f-5338e2accd11" providerId="AD" clId="Web-{EB6DF680-2C9C-BF9B-A9FC-88C426045E71}" dt="2025-11-18T05:34:35.862" v="90" actId="20577"/>
-          <ac:spMkLst>
-            <pc:docMk/>
-            <pc:sldMk cId="2863644347" sldId="259"/>
-            <ac:spMk id="3" creationId="{00000000-0000-0000-0000-000000000000}"/>
-          </ac:spMkLst>
-        </pc:spChg>
-        <pc:picChg chg="del">
-          <ac:chgData name="Monserrat Rios Hernandez" userId="S::mriosh623@alumno.uaemex.mx::32caf045-7843-489a-8d2f-5338e2accd11" providerId="AD" clId="Web-{EB6DF680-2C9C-BF9B-A9FC-88C426045E71}" dt="2025-11-18T05:36:49.911" v="111"/>
-          <ac:picMkLst>
-            <pc:docMk/>
-            <pc:sldMk cId="2863644347" sldId="259"/>
-            <ac:picMk id="6" creationId="{00000000-0000-0000-0000-000000000000}"/>
-          </ac:picMkLst>
-        </pc:picChg>
-        <pc:picChg chg="add mod">
-          <ac:chgData name="Monserrat Rios Hernandez" userId="S::mriosh623@alumno.uaemex.mx::32caf045-7843-489a-8d2f-5338e2accd11" providerId="AD" clId="Web-{EB6DF680-2C9C-BF9B-A9FC-88C426045E71}" dt="2025-11-18T05:36:52.958" v="112" actId="1076"/>
-          <ac:picMkLst>
-            <pc:docMk/>
-            <pc:sldMk cId="2863644347" sldId="259"/>
-            <ac:picMk id="7" creationId="{D9D9F828-92C4-F7F2-FB53-7F400C72F9FE}"/>
-          </ac:picMkLst>
-        </pc:picChg>
-      </pc:sldChg>
-      <pc:sldChg chg="addSp delSp modSp">
-        <pc:chgData name="Monserrat Rios Hernandez" userId="S::mriosh623@alumno.uaemex.mx::32caf045-7843-489a-8d2f-5338e2accd11" providerId="AD" clId="Web-{EB6DF680-2C9C-BF9B-A9FC-88C426045E71}" dt="2025-11-18T05:52:08.215" v="172"/>
-        <pc:sldMkLst>
-          <pc:docMk/>
-          <pc:sldMk cId="391131688" sldId="262"/>
-        </pc:sldMkLst>
-        <pc:spChg chg="mod">
-          <ac:chgData name="Monserrat Rios Hernandez" userId="S::mriosh623@alumno.uaemex.mx::32caf045-7843-489a-8d2f-5338e2accd11" providerId="AD" clId="Web-{EB6DF680-2C9C-BF9B-A9FC-88C426045E71}" dt="2025-11-18T05:45:41.507" v="145" actId="1076"/>
-          <ac:spMkLst>
-            <pc:docMk/>
-            <pc:sldMk cId="391131688" sldId="262"/>
-            <ac:spMk id="7" creationId="{00000000-0000-0000-0000-000000000000}"/>
-          </ac:spMkLst>
-        </pc:spChg>
-        <pc:spChg chg="mod">
-          <ac:chgData name="Monserrat Rios Hernandez" userId="S::mriosh623@alumno.uaemex.mx::32caf045-7843-489a-8d2f-5338e2accd11" providerId="AD" clId="Web-{EB6DF680-2C9C-BF9B-A9FC-88C426045E71}" dt="2025-11-18T05:45:41.523" v="146" actId="1076"/>
-          <ac:spMkLst>
-            <pc:docMk/>
-            <pc:sldMk cId="391131688" sldId="262"/>
-            <ac:spMk id="8" creationId="{00000000-0000-0000-0000-000000000000}"/>
-          </ac:spMkLst>
-        </pc:spChg>
-        <pc:spChg chg="mod">
-          <ac:chgData name="Monserrat Rios Hernandez" userId="S::mriosh623@alumno.uaemex.mx::32caf045-7843-489a-8d2f-5338e2accd11" providerId="AD" clId="Web-{EB6DF680-2C9C-BF9B-A9FC-88C426045E71}" dt="2025-11-18T05:45:51.086" v="147" actId="1076"/>
-          <ac:spMkLst>
-            <pc:docMk/>
-            <pc:sldMk cId="391131688" sldId="262"/>
-            <ac:spMk id="9" creationId="{00000000-0000-0000-0000-000000000000}"/>
-          </ac:spMkLst>
-        </pc:spChg>
-        <pc:spChg chg="mod">
-          <ac:chgData name="Monserrat Rios Hernandez" userId="S::mriosh623@alumno.uaemex.mx::32caf045-7843-489a-8d2f-5338e2accd11" providerId="AD" clId="Web-{EB6DF680-2C9C-BF9B-A9FC-88C426045E71}" dt="2025-11-18T05:45:51.086" v="148" actId="1076"/>
-          <ac:spMkLst>
-            <pc:docMk/>
-            <pc:sldMk cId="391131688" sldId="262"/>
-            <ac:spMk id="10" creationId="{00000000-0000-0000-0000-000000000000}"/>
-          </ac:spMkLst>
-        </pc:spChg>
-        <pc:spChg chg="mod">
-          <ac:chgData name="Monserrat Rios Hernandez" userId="S::mriosh623@alumno.uaemex.mx::32caf045-7843-489a-8d2f-5338e2accd11" providerId="AD" clId="Web-{EB6DF680-2C9C-BF9B-A9FC-88C426045E71}" dt="2025-11-18T05:46:03.226" v="149" actId="1076"/>
-          <ac:spMkLst>
-            <pc:docMk/>
-            <pc:sldMk cId="391131688" sldId="262"/>
-            <ac:spMk id="11" creationId="{00000000-0000-0000-0000-000000000000}"/>
-          </ac:spMkLst>
-        </pc:spChg>
-        <pc:spChg chg="mod">
-          <ac:chgData name="Monserrat Rios Hernandez" userId="S::mriosh623@alumno.uaemex.mx::32caf045-7843-489a-8d2f-5338e2accd11" providerId="AD" clId="Web-{EB6DF680-2C9C-BF9B-A9FC-88C426045E71}" dt="2025-11-18T05:46:03.242" v="150" actId="1076"/>
-          <ac:spMkLst>
-            <pc:docMk/>
-            <pc:sldMk cId="391131688" sldId="262"/>
-            <ac:spMk id="12" creationId="{00000000-0000-0000-0000-000000000000}"/>
-          </ac:spMkLst>
-        </pc:spChg>
-        <pc:spChg chg="mod">
-          <ac:chgData name="Monserrat Rios Hernandez" userId="S::mriosh623@alumno.uaemex.mx::32caf045-7843-489a-8d2f-5338e2accd11" providerId="AD" clId="Web-{EB6DF680-2C9C-BF9B-A9FC-88C426045E71}" dt="2025-11-18T05:46:24.008" v="152" actId="1076"/>
-          <ac:spMkLst>
-            <pc:docMk/>
-            <pc:sldMk cId="391131688" sldId="262"/>
-            <ac:spMk id="13" creationId="{00000000-0000-0000-0000-000000000000}"/>
-          </ac:spMkLst>
-        </pc:spChg>
-        <pc:spChg chg="mod">
-          <ac:chgData name="Monserrat Rios Hernandez" userId="S::mriosh623@alumno.uaemex.mx::32caf045-7843-489a-8d2f-5338e2accd11" providerId="AD" clId="Web-{EB6DF680-2C9C-BF9B-A9FC-88C426045E71}" dt="2025-11-18T05:46:20.586" v="151" actId="1076"/>
-          <ac:spMkLst>
-            <pc:docMk/>
-            <pc:sldMk cId="391131688" sldId="262"/>
-            <ac:spMk id="14" creationId="{00000000-0000-0000-0000-000000000000}"/>
-          </ac:spMkLst>
-        </pc:spChg>
-        <pc:picChg chg="add del mod">
-          <ac:chgData name="Monserrat Rios Hernandez" userId="S::mriosh623@alumno.uaemex.mx::32caf045-7843-489a-8d2f-5338e2accd11" providerId="AD" clId="Web-{EB6DF680-2C9C-BF9B-A9FC-88C426045E71}" dt="2025-11-18T05:43:30.210" v="114"/>
-          <ac:picMkLst>
-            <pc:docMk/>
-            <pc:sldMk cId="391131688" sldId="262"/>
-            <ac:picMk id="3" creationId="{1CF7B382-5440-58D1-AA83-D5936350CD01}"/>
-          </ac:picMkLst>
-        </pc:picChg>
-        <pc:picChg chg="add del mod ord">
-          <ac:chgData name="Monserrat Rios Hernandez" userId="S::mriosh623@alumno.uaemex.mx::32caf045-7843-489a-8d2f-5338e2accd11" providerId="AD" clId="Web-{EB6DF680-2C9C-BF9B-A9FC-88C426045E71}" dt="2025-11-18T05:44:50.445" v="137"/>
-          <ac:picMkLst>
-            <pc:docMk/>
-            <pc:sldMk cId="391131688" sldId="262"/>
-            <ac:picMk id="5" creationId="{5D14F1ED-F56B-B563-F4AB-69174D4DD277}"/>
-          </ac:picMkLst>
-        </pc:picChg>
-        <pc:picChg chg="add del">
-          <ac:chgData name="Monserrat Rios Hernandez" userId="S::mriosh623@alumno.uaemex.mx::32caf045-7843-489a-8d2f-5338e2accd11" providerId="AD" clId="Web-{EB6DF680-2C9C-BF9B-A9FC-88C426045E71}" dt="2025-11-18T05:45:07.288" v="138"/>
-          <ac:picMkLst>
-            <pc:docMk/>
-            <pc:sldMk cId="391131688" sldId="262"/>
-            <ac:picMk id="6" creationId="{00000000-0000-0000-0000-000000000000}"/>
-          </ac:picMkLst>
-        </pc:picChg>
-        <pc:picChg chg="add del mod">
-          <ac:chgData name="Monserrat Rios Hernandez" userId="S::mriosh623@alumno.uaemex.mx::32caf045-7843-489a-8d2f-5338e2accd11" providerId="AD" clId="Web-{EB6DF680-2C9C-BF9B-A9FC-88C426045E71}" dt="2025-11-18T05:45:20.523" v="142"/>
-          <ac:picMkLst>
-            <pc:docMk/>
-            <pc:sldMk cId="391131688" sldId="262"/>
-            <ac:picMk id="15" creationId="{C13A7C90-35A5-19B7-9733-67A1B2702CCE}"/>
-          </ac:picMkLst>
-        </pc:picChg>
-        <pc:picChg chg="add del mod ord">
-          <ac:chgData name="Monserrat Rios Hernandez" userId="S::mriosh623@alumno.uaemex.mx::32caf045-7843-489a-8d2f-5338e2accd11" providerId="AD" clId="Web-{EB6DF680-2C9C-BF9B-A9FC-88C426045E71}" dt="2025-11-18T05:51:56.902" v="169" actId="1076"/>
-          <ac:picMkLst>
-            <pc:docMk/>
-            <pc:sldMk cId="391131688" sldId="262"/>
-            <ac:picMk id="16" creationId="{CA5898F4-8ECD-63EB-47D9-B5B004BC2021}"/>
-          </ac:picMkLst>
-        </pc:picChg>
-        <pc:picChg chg="add del mod">
-          <ac:chgData name="Monserrat Rios Hernandez" userId="S::mriosh623@alumno.uaemex.mx::32caf045-7843-489a-8d2f-5338e2accd11" providerId="AD" clId="Web-{EB6DF680-2C9C-BF9B-A9FC-88C426045E71}" dt="2025-11-18T05:52:08.215" v="172"/>
-          <ac:picMkLst>
-            <pc:docMk/>
-            <pc:sldMk cId="391131688" sldId="262"/>
-            <ac:picMk id="17" creationId="{B29D534C-F17D-ACED-4537-1D34BB6F2617}"/>
-          </ac:picMkLst>
-        </pc:picChg>
-      </pc:sldChg>
-      <pc:sldChg chg="addSp delSp modSp">
-        <pc:chgData name="Monserrat Rios Hernandez" userId="S::mriosh623@alumno.uaemex.mx::32caf045-7843-489a-8d2f-5338e2accd11" providerId="AD" clId="Web-{EB6DF680-2C9C-BF9B-A9FC-88C426045E71}" dt="2025-11-18T05:52:52.216" v="186" actId="1076"/>
-        <pc:sldMkLst>
-          <pc:docMk/>
-          <pc:sldMk cId="2934605541" sldId="263"/>
-        </pc:sldMkLst>
-        <pc:spChg chg="mod">
-          <ac:chgData name="Monserrat Rios Hernandez" userId="S::mriosh623@alumno.uaemex.mx::32caf045-7843-489a-8d2f-5338e2accd11" providerId="AD" clId="Web-{EB6DF680-2C9C-BF9B-A9FC-88C426045E71}" dt="2025-11-18T05:52:34.200" v="180" actId="1076"/>
-          <ac:spMkLst>
-            <pc:docMk/>
-            <pc:sldMk cId="2934605541" sldId="263"/>
-            <ac:spMk id="7" creationId="{00000000-0000-0000-0000-000000000000}"/>
-          </ac:spMkLst>
-        </pc:spChg>
-        <pc:spChg chg="mod">
-          <ac:chgData name="Monserrat Rios Hernandez" userId="S::mriosh623@alumno.uaemex.mx::32caf045-7843-489a-8d2f-5338e2accd11" providerId="AD" clId="Web-{EB6DF680-2C9C-BF9B-A9FC-88C426045E71}" dt="2025-11-18T05:52:34.200" v="179" actId="1076"/>
-          <ac:spMkLst>
-            <pc:docMk/>
-            <pc:sldMk cId="2934605541" sldId="263"/>
-            <ac:spMk id="8" creationId="{00000000-0000-0000-0000-000000000000}"/>
-          </ac:spMkLst>
-        </pc:spChg>
-        <pc:spChg chg="mod">
-          <ac:chgData name="Monserrat Rios Hernandez" userId="S::mriosh623@alumno.uaemex.mx::32caf045-7843-489a-8d2f-5338e2accd11" providerId="AD" clId="Web-{EB6DF680-2C9C-BF9B-A9FC-88C426045E71}" dt="2025-11-18T05:52:38.028" v="181" actId="1076"/>
-          <ac:spMkLst>
-            <pc:docMk/>
-            <pc:sldMk cId="2934605541" sldId="263"/>
-            <ac:spMk id="9" creationId="{00000000-0000-0000-0000-000000000000}"/>
-          </ac:spMkLst>
-        </pc:spChg>
-        <pc:spChg chg="mod">
-          <ac:chgData name="Monserrat Rios Hernandez" userId="S::mriosh623@alumno.uaemex.mx::32caf045-7843-489a-8d2f-5338e2accd11" providerId="AD" clId="Web-{EB6DF680-2C9C-BF9B-A9FC-88C426045E71}" dt="2025-11-18T05:52:38.028" v="182" actId="1076"/>
-          <ac:spMkLst>
-            <pc:docMk/>
-            <pc:sldMk cId="2934605541" sldId="263"/>
-            <ac:spMk id="10" creationId="{00000000-0000-0000-0000-000000000000}"/>
-          </ac:spMkLst>
-        </pc:spChg>
-        <pc:spChg chg="mod">
-          <ac:chgData name="Monserrat Rios Hernandez" userId="S::mriosh623@alumno.uaemex.mx::32caf045-7843-489a-8d2f-5338e2accd11" providerId="AD" clId="Web-{EB6DF680-2C9C-BF9B-A9FC-88C426045E71}" dt="2025-11-18T05:52:46.793" v="183" actId="1076"/>
-          <ac:spMkLst>
-            <pc:docMk/>
-            <pc:sldMk cId="2934605541" sldId="263"/>
-            <ac:spMk id="11" creationId="{00000000-0000-0000-0000-000000000000}"/>
-          </ac:spMkLst>
-        </pc:spChg>
-        <pc:spChg chg="mod">
-          <ac:chgData name="Monserrat Rios Hernandez" userId="S::mriosh623@alumno.uaemex.mx::32caf045-7843-489a-8d2f-5338e2accd11" providerId="AD" clId="Web-{EB6DF680-2C9C-BF9B-A9FC-88C426045E71}" dt="2025-11-18T05:52:46.809" v="184" actId="1076"/>
-          <ac:spMkLst>
-            <pc:docMk/>
-            <pc:sldMk cId="2934605541" sldId="263"/>
-            <ac:spMk id="12" creationId="{00000000-0000-0000-0000-000000000000}"/>
-          </ac:spMkLst>
-        </pc:spChg>
-        <pc:spChg chg="mod">
-          <ac:chgData name="Monserrat Rios Hernandez" userId="S::mriosh623@alumno.uaemex.mx::32caf045-7843-489a-8d2f-5338e2accd11" providerId="AD" clId="Web-{EB6DF680-2C9C-BF9B-A9FC-88C426045E71}" dt="2025-11-18T05:52:52.200" v="185" actId="1076"/>
-          <ac:spMkLst>
-            <pc:docMk/>
-            <pc:sldMk cId="2934605541" sldId="263"/>
-            <ac:spMk id="13" creationId="{00000000-0000-0000-0000-000000000000}"/>
-          </ac:spMkLst>
-        </pc:spChg>
-        <pc:spChg chg="mod">
-          <ac:chgData name="Monserrat Rios Hernandez" userId="S::mriosh623@alumno.uaemex.mx::32caf045-7843-489a-8d2f-5338e2accd11" providerId="AD" clId="Web-{EB6DF680-2C9C-BF9B-A9FC-88C426045E71}" dt="2025-11-18T05:52:52.216" v="186" actId="1076"/>
-          <ac:spMkLst>
-            <pc:docMk/>
-            <pc:sldMk cId="2934605541" sldId="263"/>
-            <ac:spMk id="14" creationId="{00000000-0000-0000-0000-000000000000}"/>
-          </ac:spMkLst>
-        </pc:spChg>
-        <pc:picChg chg="add del mod">
-          <ac:chgData name="Monserrat Rios Hernandez" userId="S::mriosh623@alumno.uaemex.mx::32caf045-7843-489a-8d2f-5338e2accd11" providerId="AD" clId="Web-{EB6DF680-2C9C-BF9B-A9FC-88C426045E71}" dt="2025-11-18T05:52:05.996" v="171"/>
-          <ac:picMkLst>
-            <pc:docMk/>
-            <pc:sldMk cId="2934605541" sldId="263"/>
-            <ac:picMk id="3" creationId="{00000000-0000-0000-0000-000000000000}"/>
-          </ac:picMkLst>
-        </pc:picChg>
-        <pc:picChg chg="add del mod ord">
-          <ac:chgData name="Monserrat Rios Hernandez" userId="S::mriosh623@alumno.uaemex.mx::32caf045-7843-489a-8d2f-5338e2accd11" providerId="AD" clId="Web-{EB6DF680-2C9C-BF9B-A9FC-88C426045E71}" dt="2025-11-18T05:51:50.465" v="166"/>
-          <ac:picMkLst>
-            <pc:docMk/>
-            <pc:sldMk cId="2934605541" sldId="263"/>
-            <ac:picMk id="5" creationId="{5336A1DB-0362-BEF9-D4A7-544CA4FF8B76}"/>
-          </ac:picMkLst>
-        </pc:picChg>
-        <pc:picChg chg="add mod ord">
-          <ac:chgData name="Monserrat Rios Hernandez" userId="S::mriosh623@alumno.uaemex.mx::32caf045-7843-489a-8d2f-5338e2accd11" providerId="AD" clId="Web-{EB6DF680-2C9C-BF9B-A9FC-88C426045E71}" dt="2025-11-18T05:52:20.934" v="176"/>
-          <ac:picMkLst>
-            <pc:docMk/>
-            <pc:sldMk cId="2934605541" sldId="263"/>
-            <ac:picMk id="6" creationId="{6E474955-AC6C-5CD1-309E-A1FF6F025804}"/>
-          </ac:picMkLst>
-        </pc:picChg>
-      </pc:sldChg>
-      <pc:sldChg chg="addSp delSp modSp">
-        <pc:chgData name="Monserrat Rios Hernandez" userId="S::mriosh623@alumno.uaemex.mx::32caf045-7843-489a-8d2f-5338e2accd11" providerId="AD" clId="Web-{EB6DF680-2C9C-BF9B-A9FC-88C426045E71}" dt="2025-11-18T05:54:38.326" v="190" actId="1076"/>
-        <pc:sldMkLst>
-          <pc:docMk/>
-          <pc:sldMk cId="3748354161" sldId="265"/>
-        </pc:sldMkLst>
-        <pc:picChg chg="del">
-          <ac:chgData name="Monserrat Rios Hernandez" userId="S::mriosh623@alumno.uaemex.mx::32caf045-7843-489a-8d2f-5338e2accd11" providerId="AD" clId="Web-{EB6DF680-2C9C-BF9B-A9FC-88C426045E71}" dt="2025-11-18T05:54:21.044" v="187"/>
-          <ac:picMkLst>
-            <pc:docMk/>
-            <pc:sldMk cId="3748354161" sldId="265"/>
-            <ac:picMk id="5" creationId="{00000000-0000-0000-0000-000000000000}"/>
-          </ac:picMkLst>
-        </pc:picChg>
-        <pc:picChg chg="add mod">
-          <ac:chgData name="Monserrat Rios Hernandez" userId="S::mriosh623@alumno.uaemex.mx::32caf045-7843-489a-8d2f-5338e2accd11" providerId="AD" clId="Web-{EB6DF680-2C9C-BF9B-A9FC-88C426045E71}" dt="2025-11-18T05:54:38.326" v="190" actId="1076"/>
-          <ac:picMkLst>
-            <pc:docMk/>
-            <pc:sldMk cId="3748354161" sldId="265"/>
-            <ac:picMk id="6" creationId="{32F71A4D-F22F-5972-AE8E-278F7A0A75A7}"/>
-          </ac:picMkLst>
-        </pc:picChg>
-      </pc:sldChg>
-    </pc:docChg>
-  </pc:docChgLst>
-</pc:chgInfo>
 </file>
 
 <file path=ppt/notesMasters/notesMaster1.xml><?xml version="1.0" encoding="utf-8"?>
@@ -562,7 +211,7 @@
           <a:p>
             <a:fld id="{982820B5-36C0-4794-9E01-220C2D3A21D1}" type="datetimeFigureOut">
               <a:rPr lang="en-US" smtClean="0"/>
-              <a:t>11/17/2025</a:t>
+              <a:t>5/4/2026</a:t>
             </a:fld>
             <a:endParaRPr lang="en-US"/>
           </a:p>
@@ -720,7 +369,7 @@
           <a:p>
             <a:fld id="{34EFC5FD-8DBC-4524-99EA-FCD3D8A86D8D}" type="slidenum">
               <a:rPr lang="en-US" smtClean="0"/>
-              <a:t>‹#›</a:t>
+              <a:t>‹Nº›</a:t>
             </a:fld>
             <a:endParaRPr lang="en-US"/>
           </a:p>
@@ -876,7 +525,6 @@
               <a:rPr lang="en-US"/>
               <a:t>Click to edit Master title style</a:t>
             </a:r>
-            <a:endParaRPr lang="en-US" dirty="0"/>
           </a:p>
         </p:txBody>
       </p:sp>
@@ -938,11 +586,11 @@
           </a:lstStyle>
           <a:p>
             <a:r>
-              <a:rPr lang="en-US" dirty="0" err="1"/>
+              <a:rPr lang="en-US" err="1"/>
               <a:t>SlicerIGT</a:t>
             </a:r>
             <a:r>
-              <a:rPr lang="en-US" dirty="0"/>
+              <a:rPr lang="en-US"/>
               <a:t> Tutorial Series</a:t>
             </a:r>
           </a:p>
@@ -1061,7 +709,6 @@
               <a:rPr lang="en-US"/>
               <a:t>Click to edit Master title style</a:t>
             </a:r>
-            <a:endParaRPr lang="en-US" dirty="0"/>
           </a:p>
         </p:txBody>
       </p:sp>
@@ -1113,7 +760,6 @@
               <a:rPr lang="en-US"/>
               <a:t>Fifth level</a:t>
             </a:r>
-            <a:endParaRPr lang="en-US" dirty="0"/>
           </a:p>
         </p:txBody>
       </p:sp>
@@ -1134,7 +780,7 @@
           <a:p>
             <a:fld id="{7EB4E161-ED1F-470E-9199-7D8E989353A6}" type="slidenum">
               <a:rPr lang="en-US" smtClean="0"/>
-              <a:t>‹#›</a:t>
+              <a:t>‹Nº›</a:t>
             </a:fld>
             <a:endParaRPr lang="en-US"/>
           </a:p>
@@ -1227,7 +873,7 @@
           <a:lstStyle/>
           <a:p>
             <a:r>
-              <a:rPr lang="en-US" sz="1400" i="1" dirty="0">
+              <a:rPr lang="en-US" sz="1400" i="1">
                 <a:solidFill>
                   <a:srgbClr val="0070C0"/>
                 </a:solidFill>
@@ -1235,14 +881,14 @@
               <a:t>SlicerIGT</a:t>
             </a:r>
             <a:r>
-              <a:rPr lang="en-US" sz="1400" i="1" baseline="0" dirty="0">
+              <a:rPr lang="en-US" sz="1400" i="1" baseline="0">
                 <a:solidFill>
                   <a:srgbClr val="0070C0"/>
                 </a:solidFill>
               </a:rPr>
               <a:t> Tutorial Series</a:t>
             </a:r>
-            <a:endParaRPr lang="en-US" sz="1400" i="1" dirty="0">
+            <a:endParaRPr lang="en-US" sz="1400" i="1">
               <a:solidFill>
                 <a:srgbClr val="0070C0"/>
               </a:solidFill>
@@ -1299,7 +945,6 @@
               <a:rPr lang="en-US"/>
               <a:t>Click to edit Master title style</a:t>
             </a:r>
-            <a:endParaRPr lang="en-US" dirty="0"/>
           </a:p>
         </p:txBody>
       </p:sp>
@@ -1320,7 +965,7 @@
           <a:p>
             <a:fld id="{7EB4E161-ED1F-470E-9199-7D8E989353A6}" type="slidenum">
               <a:rPr lang="en-US" smtClean="0"/>
-              <a:t>‹#›</a:t>
+              <a:t>‹Nº›</a:t>
             </a:fld>
             <a:endParaRPr lang="en-US"/>
           </a:p>
@@ -1413,7 +1058,7 @@
           <a:lstStyle/>
           <a:p>
             <a:r>
-              <a:rPr lang="en-US" sz="1400" i="1" dirty="0">
+              <a:rPr lang="en-US" sz="1400" i="1">
                 <a:solidFill>
                   <a:srgbClr val="0070C0"/>
                 </a:solidFill>
@@ -1421,14 +1066,14 @@
               <a:t>SlicerIGT</a:t>
             </a:r>
             <a:r>
-              <a:rPr lang="en-US" sz="1400" i="1" baseline="0" dirty="0">
+              <a:rPr lang="en-US" sz="1400" i="1" baseline="0">
                 <a:solidFill>
                   <a:srgbClr val="0070C0"/>
                 </a:solidFill>
               </a:rPr>
               <a:t> Tutorial Series</a:t>
             </a:r>
-            <a:endParaRPr lang="en-US" sz="1400" i="1" dirty="0">
+            <a:endParaRPr lang="en-US" sz="1400" i="1">
               <a:solidFill>
                 <a:srgbClr val="0070C0"/>
               </a:solidFill>
@@ -1483,7 +1128,7 @@
           <a:p>
             <a:fld id="{7EB4E161-ED1F-470E-9199-7D8E989353A6}" type="slidenum">
               <a:rPr lang="en-US" smtClean="0"/>
-              <a:t>‹#›</a:t>
+              <a:t>‹Nº›</a:t>
             </a:fld>
             <a:endParaRPr lang="en-US"/>
           </a:p>
@@ -1576,7 +1221,7 @@
           <a:lstStyle/>
           <a:p>
             <a:r>
-              <a:rPr lang="en-US" sz="1400" i="1" dirty="0">
+              <a:rPr lang="en-US" sz="1400" i="1">
                 <a:solidFill>
                   <a:srgbClr val="0070C0"/>
                 </a:solidFill>
@@ -1584,14 +1229,14 @@
               <a:t>SlicerIGT</a:t>
             </a:r>
             <a:r>
-              <a:rPr lang="en-US" sz="1400" i="1" baseline="0" dirty="0">
+              <a:rPr lang="en-US" sz="1400" i="1" baseline="0">
                 <a:solidFill>
                   <a:srgbClr val="0070C0"/>
                 </a:solidFill>
               </a:rPr>
               <a:t> Tutorial Series</a:t>
             </a:r>
-            <a:endParaRPr lang="en-US" sz="1400" i="1" dirty="0">
+            <a:endParaRPr lang="en-US" sz="1400" i="1">
               <a:solidFill>
                 <a:srgbClr val="0070C0"/>
               </a:solidFill>
@@ -1663,7 +1308,6 @@
               <a:rPr lang="en-US"/>
               <a:t>Click to edit Master title style</a:t>
             </a:r>
-            <a:endParaRPr lang="en-US" dirty="0"/>
           </a:p>
         </p:txBody>
       </p:sp>
@@ -1725,7 +1369,6 @@
               <a:rPr lang="en-US"/>
               <a:t>Fifth level</a:t>
             </a:r>
-            <a:endParaRPr lang="en-US" dirty="0"/>
           </a:p>
         </p:txBody>
       </p:sp>
@@ -1762,14 +1405,14 @@
           <a:p>
             <a:pPr algn="l"/>
             <a:r>
-              <a:rPr lang="en-CA" dirty="0" err="1"/>
+              <a:rPr lang="en-CA" err="1"/>
               <a:t>SlicerIGT</a:t>
             </a:r>
             <a:r>
-              <a:rPr lang="en-CA" dirty="0"/>
+              <a:rPr lang="en-CA"/>
               <a:t> Tutorial Series</a:t>
             </a:r>
-            <a:endParaRPr lang="en-US" dirty="0"/>
+            <a:endParaRPr lang="en-US"/>
           </a:p>
         </p:txBody>
       </p:sp>
@@ -1808,7 +1451,7 @@
           <a:p>
             <a:fld id="{7EB4E161-ED1F-470E-9199-7D8E989353A6}" type="slidenum">
               <a:rPr lang="en-US" smtClean="0"/>
-              <a:t>‹#›</a:t>
+              <a:t>‹Nº›</a:t>
             </a:fld>
             <a:endParaRPr lang="en-US"/>
           </a:p>
@@ -2145,19 +1788,19 @@
           <a:lstStyle/>
           <a:p>
             <a:r>
-              <a:rPr lang="en-US" dirty="0" err="1"/>
+              <a:rPr lang="en-US" err="1"/>
               <a:t>Registro</a:t>
             </a:r>
             <a:r>
-              <a:rPr lang="en-US" dirty="0"/>
+              <a:rPr lang="en-US"/>
               <a:t> de puntos de </a:t>
             </a:r>
             <a:r>
-              <a:rPr lang="en-US" dirty="0" err="1"/>
+              <a:rPr lang="en-US" err="1"/>
               <a:t>referencia</a:t>
             </a:r>
             <a:r>
-              <a:rPr lang="en-US" dirty="0"/>
+              <a:rPr lang="en-US"/>
               <a:t> </a:t>
             </a:r>
           </a:p>
@@ -2179,14 +1822,14 @@
           <a:lstStyle/>
           <a:p>
             <a:r>
-              <a:rPr lang="en-US" dirty="0"/>
+              <a:rPr lang="en-US"/>
               <a:t>Serie de tutorials de </a:t>
             </a:r>
             <a:r>
-              <a:rPr lang="en-US" dirty="0" err="1"/>
+              <a:rPr lang="en-US" err="1"/>
               <a:t>SlicerIGT</a:t>
             </a:r>
-            <a:endParaRPr lang="en-US" dirty="0"/>
+            <a:endParaRPr lang="en-US"/>
           </a:p>
         </p:txBody>
       </p:sp>
@@ -2268,28 +1911,28 @@
           <a:lstStyle/>
           <a:p>
             <a:br>
-              <a:rPr lang="en-CA" dirty="0"/>
+              <a:rPr lang="en-CA"/>
             </a:br>
             <a:r>
-              <a:rPr lang="en-CA" dirty="0" err="1"/>
+              <a:rPr lang="en-CA" err="1"/>
               <a:t>Añadir</a:t>
             </a:r>
             <a:r>
-              <a:rPr lang="en-CA" dirty="0"/>
+              <a:rPr lang="en-CA"/>
               <a:t> </a:t>
             </a:r>
             <a:r>
-              <a:rPr lang="en-CA" dirty="0" err="1"/>
+              <a:rPr lang="en-CA" err="1"/>
               <a:t>el</a:t>
             </a:r>
             <a:r>
-              <a:rPr lang="en-CA" dirty="0"/>
+              <a:rPr lang="en-CA"/>
               <a:t> primer par de puntos</a:t>
             </a:r>
             <a:br>
-              <a:rPr lang="en-CA" dirty="0"/>
+              <a:rPr lang="en-CA"/>
             </a:br>
-            <a:endParaRPr lang="en-CA" dirty="0"/>
+            <a:endParaRPr lang="en-CA"/>
           </a:p>
         </p:txBody>
       </p:sp>
@@ -2385,7 +2028,7 @@
           <a:lstStyle/>
           <a:p>
             <a:r>
-              <a:rPr lang="en-US" sz="2800" b="1" dirty="0">
+              <a:rPr lang="en-US" sz="2800" b="1">
                 <a:solidFill>
                   <a:srgbClr val="FF0000"/>
                 </a:solidFill>
@@ -2471,14 +2114,14 @@
           <a:lstStyle/>
           <a:p>
             <a:r>
-              <a:rPr lang="en-US" sz="2800" b="1" dirty="0">
+              <a:rPr lang="en-US" sz="2800" b="1">
                 <a:solidFill>
                   <a:srgbClr val="FF0000"/>
                 </a:solidFill>
               </a:rPr>
               <a:t>2.</a:t>
             </a:r>
-            <a:endParaRPr lang="en-US" b="1" dirty="0">
+            <a:endParaRPr lang="en-US" b="1">
               <a:solidFill>
                 <a:srgbClr val="FF0000"/>
               </a:solidFill>
@@ -2509,14 +2152,14 @@
           <a:lstStyle/>
           <a:p>
             <a:r>
-              <a:rPr lang="en-US" sz="2800" b="1" dirty="0">
+              <a:rPr lang="en-US" sz="2800" b="1">
                 <a:solidFill>
                   <a:srgbClr val="FF0000"/>
                 </a:solidFill>
               </a:rPr>
               <a:t>3.</a:t>
             </a:r>
-            <a:endParaRPr lang="en-US" b="1" dirty="0">
+            <a:endParaRPr lang="en-US" b="1">
               <a:solidFill>
                 <a:srgbClr val="FF0000"/>
               </a:solidFill>
@@ -2593,14 +2236,14 @@
           <a:lstStyle/>
           <a:p>
             <a:r>
-              <a:rPr lang="en-US" sz="2800" b="1" dirty="0">
+              <a:rPr lang="en-US" sz="2800" b="1">
                 <a:solidFill>
                   <a:srgbClr val="FF0000"/>
                 </a:solidFill>
               </a:rPr>
               <a:t>4.</a:t>
             </a:r>
-            <a:endParaRPr lang="en-US" b="1" dirty="0">
+            <a:endParaRPr lang="en-US" b="1">
               <a:solidFill>
                 <a:srgbClr val="FF0000"/>
               </a:solidFill>
@@ -2684,39 +2327,9 @@
           <a:chExt cx="0" cy="0"/>
         </a:xfrm>
       </p:grpSpPr>
-      <p:pic>
-        <p:nvPicPr>
-          <p:cNvPr id="6" name="Picture 5">
-            <a:extLst>
-              <a:ext uri="{FF2B5EF4-FFF2-40B4-BE49-F238E27FC236}">
-                <a16:creationId xmlns:a16="http://schemas.microsoft.com/office/drawing/2014/main" id="{6E474955-AC6C-5CD1-309E-A1FF6F025804}"/>
-              </a:ext>
-            </a:extLst>
-          </p:cNvPr>
-          <p:cNvPicPr>
-            <a:picLocks noChangeAspect="1"/>
-          </p:cNvPicPr>
-          <p:nvPr/>
-        </p:nvPicPr>
-        <p:blipFill>
-          <a:blip r:embed="rId2"/>
-          <a:stretch>
-            <a:fillRect/>
-          </a:stretch>
-        </p:blipFill>
-        <p:spPr>
-          <a:xfrm>
-            <a:off x="0" y="890381"/>
-            <a:ext cx="9144000" cy="4928151"/>
-          </a:xfrm>
-          <a:prstGeom prst="rect">
-            <a:avLst/>
-          </a:prstGeom>
-        </p:spPr>
-      </p:pic>
-      <p:sp>
-        <p:nvSpPr>
-          <p:cNvPr id="2" name="Title 1"/>
+      <p:sp>
+        <p:nvSpPr>
+          <p:cNvPr id="4" name="Title 3"/>
           <p:cNvSpPr>
             <a:spLocks noGrp="1"/>
           </p:cNvSpPr>
@@ -2731,16 +2344,166 @@
           </a:bodyPr>
           <a:lstStyle/>
           <a:p>
-            <a:r>
-              <a:rPr lang="en-CA" dirty="0"/>
-              <a:t>Adding second point pair</a:t>
-            </a:r>
-          </a:p>
-        </p:txBody>
-      </p:sp>
-      <p:sp>
-        <p:nvSpPr>
-          <p:cNvPr id="4" name="Slide Number Placeholder 3"/>
+            <a:pPr algn="l"/>
+            <a:br>
+              <a:rPr lang="en-CA"/>
+            </a:br>
+            <a:r>
+              <a:rPr lang="en-CA"/>
+              <a:t>Y </a:t>
+            </a:r>
+            <a:r>
+              <a:rPr lang="en-CA" err="1"/>
+              <a:t>así</a:t>
+            </a:r>
+            <a:r>
+              <a:rPr lang="en-CA"/>
+              <a:t> </a:t>
+            </a:r>
+            <a:r>
+              <a:rPr lang="en-CA" err="1"/>
+              <a:t>sucesivamente</a:t>
+            </a:r>
+            <a:r>
+              <a:rPr lang="en-CA"/>
+              <a:t> para </a:t>
+            </a:r>
+            <a:r>
+              <a:rPr lang="en-CA" err="1"/>
+              <a:t>muchos</a:t>
+            </a:r>
+            <a:r>
+              <a:rPr lang="en-CA"/>
+              <a:t> pares de puntos...</a:t>
+            </a:r>
+            <a:br>
+              <a:rPr lang="en-CA"/>
+            </a:br>
+            <a:endParaRPr lang="en-CA"/>
+          </a:p>
+        </p:txBody>
+      </p:sp>
+      <p:sp>
+        <p:nvSpPr>
+          <p:cNvPr id="5" name="Content Placeholder 4"/>
+          <p:cNvSpPr>
+            <a:spLocks noGrp="1"/>
+          </p:cNvSpPr>
+          <p:nvPr>
+            <p:ph idx="1"/>
+          </p:nvPr>
+        </p:nvSpPr>
+        <p:spPr/>
+        <p:txBody>
+          <a:bodyPr vert="horz" lIns="91440" tIns="45720" rIns="91440" bIns="45720" rtlCol="0" anchor="t">
+            <a:normAutofit fontScale="92500" lnSpcReduction="10000"/>
+          </a:bodyPr>
+          <a:lstStyle/>
+          <a:p>
+            <a:pPr marL="0" indent="0">
+              <a:buNone/>
+            </a:pPr>
+            <a:r>
+              <a:rPr lang="en-CA"/>
+              <a:t>... </a:t>
+            </a:r>
+            <a:r>
+              <a:rPr lang="es-MX" b="0" i="0" u="none" strike="noStrike">
+                <a:solidFill>
+                  <a:srgbClr val="000000"/>
+                </a:solidFill>
+                <a:effectLst/>
+              </a:rPr>
+              <a:t>pero ¿cuántos?</a:t>
+            </a:r>
+            <a:endParaRPr lang="en-CA"/>
+          </a:p>
+          <a:p>
+            <a:pPr marL="0" indent="0">
+              <a:buNone/>
+            </a:pPr>
+            <a:endParaRPr lang="en-CA"/>
+          </a:p>
+          <a:p>
+            <a:pPr algn="l"/>
+            <a:r>
+              <a:rPr lang="es-MX" b="0" i="0" u="none" strike="noStrike">
+                <a:solidFill>
+                  <a:srgbClr val="000000"/>
+                </a:solidFill>
+                <a:effectLst/>
+              </a:rPr>
+              <a:t>Se necesitan al menos 3 pares de puntos para el registro.</a:t>
+            </a:r>
+          </a:p>
+          <a:p>
+            <a:r>
+              <a:rPr lang="es-MX" b="0" i="0" u="none" strike="noStrike">
+                <a:solidFill>
+                  <a:srgbClr val="000000"/>
+                </a:solidFill>
+                <a:effectLst/>
+              </a:rPr>
+              <a:t>Probablemente, cuantos más puntos haya, mayor será la precisión Y aumentará ligeramente el RMSE (error cuadrático medio</a:t>
+            </a:r>
+            <a:r>
+              <a:rPr lang="es-MX">
+                <a:solidFill>
+                  <a:srgbClr val="000000"/>
+                </a:solidFill>
+              </a:rPr>
+              <a:t>, por sus siglas en inglés RMSE).</a:t>
+            </a:r>
+            <a:endParaRPr lang="es-MX" b="0" i="0" u="none" strike="noStrike">
+              <a:solidFill>
+                <a:srgbClr val="000000"/>
+              </a:solidFill>
+              <a:effectLst/>
+              <a:ea typeface="Calibri"/>
+              <a:cs typeface="Calibri"/>
+            </a:endParaRPr>
+          </a:p>
+          <a:p>
+            <a:pPr algn="l"/>
+            <a:r>
+              <a:rPr lang="es-MX" b="0" i="0" u="none" strike="noStrike">
+                <a:solidFill>
+                  <a:srgbClr val="000000"/>
+                </a:solidFill>
+                <a:effectLst/>
+              </a:rPr>
+              <a:t>La precisión aumentará porque los errores aleatorios se cancelan entre sí.</a:t>
+            </a:r>
+          </a:p>
+          <a:p>
+            <a:pPr algn="l"/>
+            <a:r>
+              <a:rPr lang="es-MX" b="0" i="0" u="none" strike="noStrike">
+                <a:solidFill>
+                  <a:srgbClr val="000000"/>
+                </a:solidFill>
+                <a:effectLst/>
+              </a:rPr>
+              <a:t>El RMSE aumentará debido a un menor sobreajuste.</a:t>
+            </a:r>
+          </a:p>
+          <a:p>
+            <a:pPr algn="l"/>
+            <a:r>
+              <a:rPr lang="es-MX" b="0" i="0" u="none" strike="noStrike">
+                <a:solidFill>
+                  <a:srgbClr val="000000"/>
+                </a:solidFill>
+                <a:effectLst/>
+              </a:rPr>
+              <a:t>¡El RMSE es una mezcla desconocida de precisión y exactitud!</a:t>
+            </a:r>
+          </a:p>
+        </p:txBody>
+      </p:sp>
+      <p:sp>
+        <p:nvSpPr>
+          <p:cNvPr id="3" name="Slide Number Placeholder 2"/>
           <p:cNvSpPr>
             <a:spLocks noGrp="1"/>
           </p:cNvSpPr>
@@ -2761,346 +2524,10 @@
           </a:p>
         </p:txBody>
       </p:sp>
-      <p:sp>
-        <p:nvSpPr>
-          <p:cNvPr id="7" name="Rectangle 6"/>
-          <p:cNvSpPr/>
-          <p:nvPr/>
-        </p:nvSpPr>
-        <p:spPr>
-          <a:xfrm>
-            <a:off x="4018602" y="1061933"/>
-            <a:ext cx="463588" cy="340203"/>
-          </a:xfrm>
-          <a:prstGeom prst="rect">
-            <a:avLst/>
-          </a:prstGeom>
-          <a:noFill/>
-          <a:ln w="25400">
-            <a:solidFill>
-              <a:srgbClr val="FF0000"/>
-            </a:solidFill>
-          </a:ln>
-        </p:spPr>
-        <p:style>
-          <a:lnRef idx="2">
-            <a:schemeClr val="accent1">
-              <a:shade val="50000"/>
-            </a:schemeClr>
-          </a:lnRef>
-          <a:fillRef idx="1">
-            <a:schemeClr val="accent1"/>
-          </a:fillRef>
-          <a:effectRef idx="0">
-            <a:schemeClr val="accent1"/>
-          </a:effectRef>
-          <a:fontRef idx="minor">
-            <a:schemeClr val="lt1"/>
-          </a:fontRef>
-        </p:style>
-        <p:txBody>
-          <a:bodyPr rtlCol="0" anchor="ctr"/>
-          <a:lstStyle/>
-          <a:p>
-            <a:pPr algn="ctr"/>
-            <a:endParaRPr lang="en-US"/>
-          </a:p>
-        </p:txBody>
-      </p:sp>
-      <p:sp>
-        <p:nvSpPr>
-          <p:cNvPr id="8" name="TextBox 7"/>
-          <p:cNvSpPr txBox="1"/>
-          <p:nvPr/>
-        </p:nvSpPr>
-        <p:spPr>
-          <a:xfrm>
-            <a:off x="4482190" y="890179"/>
-            <a:ext cx="463588" cy="523220"/>
-          </a:xfrm>
-          <a:prstGeom prst="rect">
-            <a:avLst/>
-          </a:prstGeom>
-          <a:noFill/>
-        </p:spPr>
-        <p:txBody>
-          <a:bodyPr wrap="none" rtlCol="0">
-            <a:spAutoFit/>
-          </a:bodyPr>
-          <a:lstStyle/>
-          <a:p>
-            <a:r>
-              <a:rPr lang="en-US" sz="2800" b="1" dirty="0">
-                <a:solidFill>
-                  <a:srgbClr val="FF0000"/>
-                </a:solidFill>
-              </a:rPr>
-              <a:t>1.</a:t>
-            </a:r>
-            <a:endParaRPr lang="en-US" b="1" dirty="0">
-              <a:solidFill>
-                <a:srgbClr val="FF0000"/>
-              </a:solidFill>
-            </a:endParaRPr>
-          </a:p>
-        </p:txBody>
-      </p:sp>
-      <p:sp>
-        <p:nvSpPr>
-          <p:cNvPr id="9" name="Rectangle 8"/>
-          <p:cNvSpPr/>
-          <p:nvPr/>
-        </p:nvSpPr>
-        <p:spPr>
-          <a:xfrm>
-            <a:off x="3152876" y="4478865"/>
-            <a:ext cx="717701" cy="340203"/>
-          </a:xfrm>
-          <a:prstGeom prst="rect">
-            <a:avLst/>
-          </a:prstGeom>
-          <a:noFill/>
-          <a:ln w="25400">
-            <a:solidFill>
-              <a:srgbClr val="FF0000"/>
-            </a:solidFill>
-          </a:ln>
-        </p:spPr>
-        <p:style>
-          <a:lnRef idx="2">
-            <a:schemeClr val="accent1">
-              <a:shade val="50000"/>
-            </a:schemeClr>
-          </a:lnRef>
-          <a:fillRef idx="1">
-            <a:schemeClr val="accent1"/>
-          </a:fillRef>
-          <a:effectRef idx="0">
-            <a:schemeClr val="accent1"/>
-          </a:effectRef>
-          <a:fontRef idx="minor">
-            <a:schemeClr val="lt1"/>
-          </a:fontRef>
-        </p:style>
-        <p:txBody>
-          <a:bodyPr rtlCol="0" anchor="ctr"/>
-          <a:lstStyle/>
-          <a:p>
-            <a:pPr algn="ctr"/>
-            <a:endParaRPr lang="en-US"/>
-          </a:p>
-        </p:txBody>
-      </p:sp>
-      <p:sp>
-        <p:nvSpPr>
-          <p:cNvPr id="10" name="TextBox 9"/>
-          <p:cNvSpPr txBox="1"/>
-          <p:nvPr/>
-        </p:nvSpPr>
-        <p:spPr>
-          <a:xfrm>
-            <a:off x="3746157" y="4055339"/>
-            <a:ext cx="463588" cy="523220"/>
-          </a:xfrm>
-          <a:prstGeom prst="rect">
-            <a:avLst/>
-          </a:prstGeom>
-          <a:noFill/>
-        </p:spPr>
-        <p:txBody>
-          <a:bodyPr wrap="none" rtlCol="0">
-            <a:spAutoFit/>
-          </a:bodyPr>
-          <a:lstStyle/>
-          <a:p>
-            <a:r>
-              <a:rPr lang="en-US" sz="2800" b="1" dirty="0">
-                <a:solidFill>
-                  <a:srgbClr val="FF0000"/>
-                </a:solidFill>
-              </a:rPr>
-              <a:t>2.</a:t>
-            </a:r>
-            <a:endParaRPr lang="en-US" b="1" dirty="0">
-              <a:solidFill>
-                <a:srgbClr val="FF0000"/>
-              </a:solidFill>
-            </a:endParaRPr>
-          </a:p>
-        </p:txBody>
-      </p:sp>
-      <p:sp>
-        <p:nvSpPr>
-          <p:cNvPr id="11" name="TextBox 10"/>
-          <p:cNvSpPr txBox="1"/>
-          <p:nvPr/>
-        </p:nvSpPr>
-        <p:spPr>
-          <a:xfrm>
-            <a:off x="2759572" y="2999859"/>
-            <a:ext cx="463588" cy="523220"/>
-          </a:xfrm>
-          <a:prstGeom prst="rect">
-            <a:avLst/>
-          </a:prstGeom>
-          <a:noFill/>
-        </p:spPr>
-        <p:txBody>
-          <a:bodyPr wrap="none" rtlCol="0">
-            <a:spAutoFit/>
-          </a:bodyPr>
-          <a:lstStyle/>
-          <a:p>
-            <a:r>
-              <a:rPr lang="en-US" sz="2800" b="1" dirty="0">
-                <a:solidFill>
-                  <a:srgbClr val="FF0000"/>
-                </a:solidFill>
-              </a:rPr>
-              <a:t>3.</a:t>
-            </a:r>
-            <a:endParaRPr lang="en-US" b="1" dirty="0">
-              <a:solidFill>
-                <a:srgbClr val="FF0000"/>
-              </a:solidFill>
-            </a:endParaRPr>
-          </a:p>
-        </p:txBody>
-      </p:sp>
-      <p:sp>
-        <p:nvSpPr>
-          <p:cNvPr id="12" name="Rectangle 11"/>
-          <p:cNvSpPr/>
-          <p:nvPr/>
-        </p:nvSpPr>
-        <p:spPr>
-          <a:xfrm>
-            <a:off x="2759572" y="3447040"/>
-            <a:ext cx="401854" cy="340203"/>
-          </a:xfrm>
-          <a:prstGeom prst="rect">
-            <a:avLst/>
-          </a:prstGeom>
-          <a:noFill/>
-          <a:ln w="25400">
-            <a:solidFill>
-              <a:srgbClr val="FF0000"/>
-            </a:solidFill>
-          </a:ln>
-        </p:spPr>
-        <p:style>
-          <a:lnRef idx="2">
-            <a:schemeClr val="accent1">
-              <a:shade val="50000"/>
-            </a:schemeClr>
-          </a:lnRef>
-          <a:fillRef idx="1">
-            <a:schemeClr val="accent1"/>
-          </a:fillRef>
-          <a:effectRef idx="0">
-            <a:schemeClr val="accent1"/>
-          </a:effectRef>
-          <a:fontRef idx="minor">
-            <a:schemeClr val="lt1"/>
-          </a:fontRef>
-        </p:style>
-        <p:txBody>
-          <a:bodyPr rtlCol="0" anchor="ctr"/>
-          <a:lstStyle/>
-          <a:p>
-            <a:pPr algn="ctr"/>
-            <a:endParaRPr lang="en-US"/>
-          </a:p>
-        </p:txBody>
-      </p:sp>
-      <p:sp>
-        <p:nvSpPr>
-          <p:cNvPr id="13" name="TextBox 12"/>
-          <p:cNvSpPr txBox="1"/>
-          <p:nvPr/>
-        </p:nvSpPr>
-        <p:spPr>
-          <a:xfrm>
-            <a:off x="7484448" y="2174683"/>
-            <a:ext cx="463588" cy="523220"/>
-          </a:xfrm>
-          <a:prstGeom prst="rect">
-            <a:avLst/>
-          </a:prstGeom>
-          <a:noFill/>
-        </p:spPr>
-        <p:txBody>
-          <a:bodyPr wrap="none" rtlCol="0">
-            <a:spAutoFit/>
-          </a:bodyPr>
-          <a:lstStyle/>
-          <a:p>
-            <a:r>
-              <a:rPr lang="en-US" sz="2800" b="1" dirty="0">
-                <a:solidFill>
-                  <a:srgbClr val="FF0000"/>
-                </a:solidFill>
-              </a:rPr>
-              <a:t>4.</a:t>
-            </a:r>
-            <a:endParaRPr lang="en-US" b="1" dirty="0">
-              <a:solidFill>
-                <a:srgbClr val="FF0000"/>
-              </a:solidFill>
-            </a:endParaRPr>
-          </a:p>
-        </p:txBody>
-      </p:sp>
-      <p:sp>
-        <p:nvSpPr>
-          <p:cNvPr id="14" name="Rectangle 13"/>
-          <p:cNvSpPr/>
-          <p:nvPr/>
-        </p:nvSpPr>
-        <p:spPr>
-          <a:xfrm>
-            <a:off x="7484448" y="2621864"/>
-            <a:ext cx="401854" cy="340203"/>
-          </a:xfrm>
-          <a:prstGeom prst="rect">
-            <a:avLst/>
-          </a:prstGeom>
-          <a:noFill/>
-          <a:ln w="25400">
-            <a:solidFill>
-              <a:srgbClr val="FF0000"/>
-            </a:solidFill>
-          </a:ln>
-        </p:spPr>
-        <p:style>
-          <a:lnRef idx="2">
-            <a:schemeClr val="accent1">
-              <a:shade val="50000"/>
-            </a:schemeClr>
-          </a:lnRef>
-          <a:fillRef idx="1">
-            <a:schemeClr val="accent1"/>
-          </a:fillRef>
-          <a:effectRef idx="0">
-            <a:schemeClr val="accent1"/>
-          </a:effectRef>
-          <a:fontRef idx="minor">
-            <a:schemeClr val="lt1"/>
-          </a:fontRef>
-        </p:style>
-        <p:txBody>
-          <a:bodyPr rtlCol="0" anchor="ctr"/>
-          <a:lstStyle/>
-          <a:p>
-            <a:pPr algn="ctr"/>
-            <a:endParaRPr lang="en-US"/>
-          </a:p>
-        </p:txBody>
-      </p:sp>
     </p:spTree>
     <p:extLst>
       <p:ext uri="{BB962C8B-B14F-4D97-AF65-F5344CB8AC3E}">
-        <p14:creationId xmlns:p14="http://schemas.microsoft.com/office/powerpoint/2010/main" val="2934605541"/>
+        <p14:creationId xmlns:p14="http://schemas.microsoft.com/office/powerpoint/2010/main" val="2544675277"/>
       </p:ext>
     </p:extLst>
   </p:cSld>
@@ -3129,218 +2556,6 @@
       </p:grpSpPr>
       <p:sp>
         <p:nvSpPr>
-          <p:cNvPr id="4" name="Title 3"/>
-          <p:cNvSpPr>
-            <a:spLocks noGrp="1"/>
-          </p:cNvSpPr>
-          <p:nvPr>
-            <p:ph type="title"/>
-          </p:nvPr>
-        </p:nvSpPr>
-        <p:spPr/>
-        <p:txBody>
-          <a:bodyPr>
-            <a:normAutofit fontScale="90000"/>
-          </a:bodyPr>
-          <a:lstStyle/>
-          <a:p>
-            <a:pPr algn="l"/>
-            <a:br>
-              <a:rPr lang="en-CA" dirty="0"/>
-            </a:br>
-            <a:r>
-              <a:rPr lang="en-CA" dirty="0"/>
-              <a:t>Y </a:t>
-            </a:r>
-            <a:r>
-              <a:rPr lang="en-CA" dirty="0" err="1"/>
-              <a:t>así</a:t>
-            </a:r>
-            <a:r>
-              <a:rPr lang="en-CA" dirty="0"/>
-              <a:t> </a:t>
-            </a:r>
-            <a:r>
-              <a:rPr lang="en-CA" dirty="0" err="1"/>
-              <a:t>sucesivamente</a:t>
-            </a:r>
-            <a:r>
-              <a:rPr lang="en-CA" dirty="0"/>
-              <a:t> para </a:t>
-            </a:r>
-            <a:r>
-              <a:rPr lang="en-CA" dirty="0" err="1"/>
-              <a:t>muchos</a:t>
-            </a:r>
-            <a:r>
-              <a:rPr lang="en-CA" dirty="0"/>
-              <a:t> pares de puntos...</a:t>
-            </a:r>
-            <a:br>
-              <a:rPr lang="en-CA" dirty="0"/>
-            </a:br>
-            <a:endParaRPr lang="en-CA" dirty="0"/>
-          </a:p>
-        </p:txBody>
-      </p:sp>
-      <p:sp>
-        <p:nvSpPr>
-          <p:cNvPr id="5" name="Content Placeholder 4"/>
-          <p:cNvSpPr>
-            <a:spLocks noGrp="1"/>
-          </p:cNvSpPr>
-          <p:nvPr>
-            <p:ph idx="1"/>
-          </p:nvPr>
-        </p:nvSpPr>
-        <p:spPr/>
-        <p:txBody>
-          <a:bodyPr>
-            <a:normAutofit fontScale="92500" lnSpcReduction="10000"/>
-          </a:bodyPr>
-          <a:lstStyle/>
-          <a:p>
-            <a:pPr marL="0" indent="0">
-              <a:buNone/>
-            </a:pPr>
-            <a:r>
-              <a:rPr lang="en-CA" dirty="0"/>
-              <a:t>... </a:t>
-            </a:r>
-            <a:r>
-              <a:rPr lang="es-MX" b="0" i="0" u="none" strike="noStrike" dirty="0">
-                <a:solidFill>
-                  <a:srgbClr val="000000"/>
-                </a:solidFill>
-                <a:effectLst/>
-              </a:rPr>
-              <a:t>pero ¿cuántos?</a:t>
-            </a:r>
-            <a:endParaRPr lang="en-CA" dirty="0"/>
-          </a:p>
-          <a:p>
-            <a:pPr marL="0" indent="0">
-              <a:buNone/>
-            </a:pPr>
-            <a:endParaRPr lang="en-CA" dirty="0"/>
-          </a:p>
-          <a:p>
-            <a:pPr algn="l"/>
-            <a:r>
-              <a:rPr lang="es-MX" b="0" i="0" u="none" strike="noStrike" dirty="0">
-                <a:solidFill>
-                  <a:srgbClr val="000000"/>
-                </a:solidFill>
-                <a:effectLst/>
-              </a:rPr>
-              <a:t>Se necesitan al menos 3 pares de puntos para el registro.</a:t>
-            </a:r>
-          </a:p>
-          <a:p>
-            <a:pPr algn="l"/>
-            <a:r>
-              <a:rPr lang="es-MX" b="0" i="0" u="none" strike="noStrike" dirty="0">
-                <a:solidFill>
-                  <a:srgbClr val="000000"/>
-                </a:solidFill>
-                <a:effectLst/>
-              </a:rPr>
-              <a:t>Probablemente, cuantos más puntos haya, mayor será la precisión Y aumentará ligeramente el RMSE (error cuadrático medio).</a:t>
-            </a:r>
-          </a:p>
-          <a:p>
-            <a:pPr algn="l"/>
-            <a:r>
-              <a:rPr lang="es-MX" b="0" i="0" u="none" strike="noStrike" dirty="0">
-                <a:solidFill>
-                  <a:srgbClr val="000000"/>
-                </a:solidFill>
-                <a:effectLst/>
-              </a:rPr>
-              <a:t>La precisión aumentará porque los errores aleatorios se cancelan entre sí.</a:t>
-            </a:r>
-          </a:p>
-          <a:p>
-            <a:pPr algn="l"/>
-            <a:r>
-              <a:rPr lang="es-MX" b="0" i="0" u="none" strike="noStrike" dirty="0">
-                <a:solidFill>
-                  <a:srgbClr val="000000"/>
-                </a:solidFill>
-                <a:effectLst/>
-              </a:rPr>
-              <a:t>El RMSE aumentará debido a un menor sobreajuste.</a:t>
-            </a:r>
-          </a:p>
-          <a:p>
-            <a:pPr algn="l"/>
-            <a:r>
-              <a:rPr lang="es-MX" b="0" i="0" u="none" strike="noStrike" dirty="0">
-                <a:solidFill>
-                  <a:srgbClr val="000000"/>
-                </a:solidFill>
-                <a:effectLst/>
-              </a:rPr>
-              <a:t>¡El RMSE es una mezcla desconocida de precisión y exactitud!</a:t>
-            </a:r>
-          </a:p>
-        </p:txBody>
-      </p:sp>
-      <p:sp>
-        <p:nvSpPr>
-          <p:cNvPr id="3" name="Slide Number Placeholder 2"/>
-          <p:cNvSpPr>
-            <a:spLocks noGrp="1"/>
-          </p:cNvSpPr>
-          <p:nvPr>
-            <p:ph type="sldNum" sz="quarter" idx="12"/>
-          </p:nvPr>
-        </p:nvSpPr>
-        <p:spPr/>
-        <p:txBody>
-          <a:bodyPr/>
-          <a:lstStyle/>
-          <a:p>
-            <a:fld id="{7EB4E161-ED1F-470E-9199-7D8E989353A6}" type="slidenum">
-              <a:rPr lang="en-US" smtClean="0"/>
-              <a:t>12</a:t>
-            </a:fld>
-            <a:endParaRPr lang="en-US"/>
-          </a:p>
-        </p:txBody>
-      </p:sp>
-    </p:spTree>
-    <p:extLst>
-      <p:ext uri="{BB962C8B-B14F-4D97-AF65-F5344CB8AC3E}">
-        <p14:creationId xmlns:p14="http://schemas.microsoft.com/office/powerpoint/2010/main" val="2544675277"/>
-      </p:ext>
-    </p:extLst>
-  </p:cSld>
-  <p:clrMapOvr>
-    <a:masterClrMapping/>
-  </p:clrMapOvr>
-</p:sld>
-</file>
-
-<file path=ppt/slides/slide13.xml><?xml version="1.0" encoding="utf-8"?>
-<p:sld xmlns:a="http://schemas.openxmlformats.org/drawingml/2006/main" xmlns:r="http://schemas.openxmlformats.org/officeDocument/2006/relationships" xmlns:p="http://schemas.openxmlformats.org/presentationml/2006/main">
-  <p:cSld>
-    <p:spTree>
-      <p:nvGrpSpPr>
-        <p:cNvPr id="1" name=""/>
-        <p:cNvGrpSpPr/>
-        <p:nvPr/>
-      </p:nvGrpSpPr>
-      <p:grpSpPr>
-        <a:xfrm>
-          <a:off x="0" y="0"/>
-          <a:ext cx="0" cy="0"/>
-          <a:chOff x="0" y="0"/>
-          <a:chExt cx="0" cy="0"/>
-        </a:xfrm>
-      </p:grpSpPr>
-      <p:sp>
-        <p:nvSpPr>
           <p:cNvPr id="2" name="Title 1"/>
           <p:cNvSpPr>
             <a:spLocks noGrp="1"/>
@@ -3358,44 +2573,44 @@
           <a:p>
             <a:pPr algn="l"/>
             <a:br>
-              <a:rPr lang="en-CA" dirty="0"/>
+              <a:rPr lang="en-CA"/>
             </a:br>
             <a:r>
-              <a:rPr lang="en-CA" dirty="0" err="1"/>
+              <a:rPr lang="en-CA" err="1"/>
               <a:t>Cuando</a:t>
             </a:r>
             <a:r>
-              <a:rPr lang="en-CA" dirty="0"/>
+              <a:rPr lang="en-CA"/>
               <a:t> se </a:t>
             </a:r>
             <a:r>
-              <a:rPr lang="en-CA" dirty="0" err="1"/>
+              <a:rPr lang="en-CA" err="1"/>
               <a:t>añaden</a:t>
             </a:r>
             <a:r>
-              <a:rPr lang="en-CA" dirty="0"/>
+              <a:rPr lang="en-CA"/>
               <a:t> </a:t>
             </a:r>
             <a:r>
-              <a:rPr lang="en-CA" dirty="0" err="1"/>
+              <a:rPr lang="en-CA" err="1"/>
               <a:t>todos</a:t>
             </a:r>
             <a:r>
-              <a:rPr lang="en-CA" dirty="0"/>
+              <a:rPr lang="en-CA"/>
               <a:t> </a:t>
             </a:r>
             <a:r>
-              <a:rPr lang="en-CA" dirty="0" err="1"/>
+              <a:rPr lang="en-CA" err="1"/>
               <a:t>los</a:t>
             </a:r>
             <a:r>
-              <a:rPr lang="en-CA" dirty="0"/>
+              <a:rPr lang="en-CA"/>
               <a:t> pares de puntos</a:t>
             </a:r>
             <a:br>
-              <a:rPr lang="en-CA" dirty="0"/>
+              <a:rPr lang="en-CA"/>
             </a:br>
-            <a:endParaRPr lang="en-CA" dirty="0"/>
+            <a:endParaRPr lang="en-CA"/>
           </a:p>
         </p:txBody>
       </p:sp>
@@ -3423,7 +2638,7 @@
           <a:p>
             <a:pPr algn="l"/>
             <a:r>
-              <a:rPr lang="es-MX" b="0" i="0" u="none" strike="noStrike" dirty="0">
+              <a:rPr lang="es-MX" b="0" i="0" u="none" strike="noStrike">
                 <a:solidFill>
                   <a:srgbClr val="000000"/>
                 </a:solidFill>
@@ -3432,7 +2647,7 @@
               <a:t>Es recomendable cambiar de </a:t>
             </a:r>
             <a:r>
-              <a:rPr lang="es-MX" b="1" i="0" u="none" strike="noStrike" dirty="0">
+              <a:rPr lang="es-MX" b="1" i="0" u="none" strike="noStrike">
                 <a:solidFill>
                   <a:srgbClr val="000000"/>
                 </a:solidFill>
@@ -3441,7 +2656,7 @@
               <a:t>Actualización automática </a:t>
             </a:r>
             <a:r>
-              <a:rPr lang="es-MX" b="0" i="0" u="none" strike="noStrike" dirty="0">
+              <a:rPr lang="es-MX" b="0" i="0" u="none" strike="noStrike">
                 <a:solidFill>
                   <a:srgbClr val="000000"/>
                 </a:solidFill>
@@ -3450,7 +2665,7 @@
               <a:t>a </a:t>
             </a:r>
             <a:r>
-              <a:rPr lang="es-MX" b="1" i="0" u="none" strike="noStrike" dirty="0">
+              <a:rPr lang="es-MX" b="1" i="0" u="none" strike="noStrike">
                 <a:solidFill>
                   <a:srgbClr val="000000"/>
                 </a:solidFill>
@@ -3459,7 +2674,7 @@
               <a:t>Actualización manual </a:t>
             </a:r>
             <a:r>
-              <a:rPr lang="es-MX" b="0" i="0" u="none" strike="noStrike" dirty="0">
+              <a:rPr lang="es-MX" b="0" i="0" u="none" strike="noStrike">
                 <a:solidFill>
                   <a:srgbClr val="000000"/>
                 </a:solidFill>
@@ -3471,7 +2686,7 @@
           <a:p>
             <a:pPr algn="l"/>
             <a:r>
-              <a:rPr lang="es-MX" b="0" i="0" u="none" strike="noStrike" dirty="0">
+              <a:rPr lang="es-MX" b="0" i="0" u="none" strike="noStrike">
                 <a:solidFill>
                   <a:srgbClr val="000000"/>
                 </a:solidFill>
@@ -3480,7 +2695,7 @@
               <a:t>Guarde la transformación </a:t>
             </a:r>
             <a:r>
-              <a:rPr lang="es-MX" b="1" i="0" u="none" strike="noStrike" dirty="0">
+              <a:rPr lang="es-MX" b="1" i="0" u="none" strike="noStrike">
                 <a:solidFill>
                   <a:srgbClr val="000000"/>
                 </a:solidFill>
@@ -3489,7 +2704,7 @@
               <a:t>Referencia a Ras </a:t>
             </a:r>
             <a:r>
-              <a:rPr lang="es-MX" b="0" i="0" u="none" strike="noStrike" dirty="0">
+              <a:rPr lang="es-MX" b="0" i="0" u="none" strike="noStrike">
                 <a:solidFill>
                   <a:srgbClr val="000000"/>
                 </a:solidFill>
@@ -3502,7 +2717,7 @@
             <a:pPr marL="0" indent="0" algn="l">
               <a:buNone/>
             </a:pPr>
-            <a:endParaRPr lang="es-MX" b="0" i="0" u="none" strike="noStrike" dirty="0">
+            <a:endParaRPr lang="es-MX" b="0" i="0" u="none" strike="noStrike">
               <a:solidFill>
                 <a:srgbClr val="000000"/>
               </a:solidFill>
@@ -3528,7 +2743,7 @@
           <a:p>
             <a:fld id="{7EB4E161-ED1F-470E-9199-7D8E989353A6}" type="slidenum">
               <a:rPr lang="en-US" smtClean="0"/>
-              <a:t>13</a:t>
+              <a:t>12</a:t>
             </a:fld>
             <a:endParaRPr lang="en-US"/>
           </a:p>
@@ -3612,22 +2827,22 @@
           <a:lstStyle/>
           <a:p>
             <a:r>
-              <a:rPr lang="en-US" dirty="0" err="1"/>
+              <a:rPr lang="en-US" err="1"/>
               <a:t>Registro</a:t>
             </a:r>
             <a:r>
-              <a:rPr lang="en-US" dirty="0"/>
+              <a:rPr lang="en-US"/>
               <a:t> de puntos de </a:t>
             </a:r>
             <a:r>
-              <a:rPr lang="en-US" dirty="0" err="1"/>
+              <a:rPr lang="en-US" err="1"/>
               <a:t>referencia</a:t>
             </a:r>
             <a:r>
-              <a:rPr lang="en-US" dirty="0"/>
+              <a:rPr lang="en-US"/>
               <a:t> </a:t>
             </a:r>
-            <a:endParaRPr lang="en-CA" dirty="0"/>
+            <a:endParaRPr lang="en-CA"/>
           </a:p>
         </p:txBody>
       </p:sp>
@@ -3655,7 +2870,7 @@
           <a:p>
             <a:pPr algn="l"/>
             <a:r>
-              <a:rPr lang="es-MX" b="0" i="0" u="none" strike="noStrike" dirty="0">
+              <a:rPr lang="es-MX" b="0" i="0" u="none" strike="noStrike">
                 <a:solidFill>
                   <a:srgbClr val="000000"/>
                 </a:solidFill>
@@ -3667,7 +2882,7 @@
           <a:p>
             <a:pPr algn="l"/>
             <a:r>
-              <a:rPr lang="es-MX" b="0" i="0" u="none" strike="noStrike" dirty="0">
+              <a:rPr lang="es-MX" b="0" i="0" u="none" strike="noStrike">
                 <a:solidFill>
                   <a:srgbClr val="000000"/>
                 </a:solidFill>
@@ -3679,7 +2894,7 @@
           <a:p>
             <a:pPr algn="l"/>
             <a:r>
-              <a:rPr lang="es-MX" b="0" i="0" u="none" strike="noStrike" dirty="0">
+              <a:rPr lang="es-MX" b="0" i="0" u="none" strike="noStrike">
                 <a:solidFill>
                   <a:srgbClr val="000000"/>
                 </a:solidFill>
@@ -3691,7 +2906,7 @@
           <a:p>
             <a:pPr algn="l"/>
             <a:r>
-              <a:rPr lang="es-MX" b="0" i="0" u="none" strike="noStrike" dirty="0">
+              <a:rPr lang="es-MX" b="0" i="0" u="none" strike="noStrike">
                 <a:solidFill>
                   <a:srgbClr val="000000"/>
                 </a:solidFill>
@@ -3703,7 +2918,7 @@
           <a:p>
             <a:pPr algn="l"/>
             <a:r>
-              <a:rPr lang="es-MX" b="0" i="0" u="none" strike="noStrike" dirty="0">
+              <a:rPr lang="es-MX" b="0" i="0" u="none" strike="noStrike">
                 <a:solidFill>
                   <a:srgbClr val="000000"/>
                 </a:solidFill>
@@ -3716,7 +2931,7 @@
             <a:pPr marL="0" indent="0" algn="l">
               <a:buNone/>
             </a:pPr>
-            <a:endParaRPr lang="es-MX" b="0" i="0" u="none" strike="noStrike" dirty="0">
+            <a:endParaRPr lang="es-MX" b="0" i="0" u="none" strike="noStrike">
               <a:solidFill>
                 <a:srgbClr val="000000"/>
               </a:solidFill>
@@ -3744,7 +2959,7 @@
               <a:rPr lang="en-US" smtClean="0"/>
               <a:t>2</a:t>
             </a:fld>
-            <a:endParaRPr lang="en-US" dirty="0"/>
+            <a:endParaRPr lang="en-US"/>
           </a:p>
         </p:txBody>
       </p:sp>
@@ -4013,7 +3228,7 @@
             <a:lstStyle/>
             <a:p>
               <a:r>
-                <a:rPr lang="en-CA" b="1" dirty="0"/>
+                <a:rPr lang="en-CA" b="1"/>
                 <a:t>X</a:t>
               </a:r>
             </a:p>
@@ -4042,7 +3257,7 @@
             <a:lstStyle/>
             <a:p>
               <a:r>
-                <a:rPr lang="en-CA" b="1" dirty="0"/>
+                <a:rPr lang="en-CA" b="1"/>
                 <a:t>Y</a:t>
               </a:r>
             </a:p>
@@ -4071,7 +3286,7 @@
             <a:lstStyle/>
             <a:p>
               <a:r>
-                <a:rPr lang="en-CA" b="1" dirty="0"/>
+                <a:rPr lang="en-CA" b="1"/>
                 <a:t>Z</a:t>
               </a:r>
             </a:p>
@@ -4223,7 +3438,7 @@
             <a:lstStyle/>
             <a:p>
               <a:r>
-                <a:rPr lang="en-CA" b="1" dirty="0"/>
+                <a:rPr lang="en-CA" b="1"/>
                 <a:t>X</a:t>
               </a:r>
             </a:p>
@@ -4252,7 +3467,7 @@
             <a:lstStyle/>
             <a:p>
               <a:r>
-                <a:rPr lang="en-CA" b="1" dirty="0"/>
+                <a:rPr lang="en-CA" b="1"/>
                 <a:t>Y</a:t>
               </a:r>
             </a:p>
@@ -4281,7 +3496,7 @@
             <a:lstStyle/>
             <a:p>
               <a:r>
-                <a:rPr lang="en-CA" b="1" dirty="0"/>
+                <a:rPr lang="en-CA" b="1"/>
                 <a:t>Z</a:t>
               </a:r>
             </a:p>
@@ -4333,7 +3548,7 @@
           <a:lstStyle/>
           <a:p>
             <a:pPr algn="ctr"/>
-            <a:endParaRPr lang="en-CA" dirty="0"/>
+            <a:endParaRPr lang="en-CA"/>
           </a:p>
         </p:txBody>
       </p:sp>
@@ -4591,10 +3806,10 @@
           <a:lstStyle/>
           <a:p>
             <a:r>
-              <a:rPr lang="en-CA" dirty="0" err="1"/>
+              <a:rPr lang="en-CA" err="1"/>
               <a:t>Referencia</a:t>
             </a:r>
-            <a:endParaRPr lang="en-CA" dirty="0"/>
+            <a:endParaRPr lang="en-CA"/>
           </a:p>
         </p:txBody>
       </p:sp>
@@ -4621,7 +3836,7 @@
           <a:lstStyle/>
           <a:p>
             <a:r>
-              <a:rPr lang="en-CA" dirty="0"/>
+              <a:rPr lang="en-CA"/>
               <a:t>Ras</a:t>
             </a:r>
           </a:p>
@@ -4650,7 +3865,7 @@
           <a:lstStyle/>
           <a:p>
             <a:r>
-              <a:rPr lang="en-CA" dirty="0" err="1">
+              <a:rPr lang="en-CA" err="1">
                 <a:solidFill>
                   <a:srgbClr val="0070C0"/>
                 </a:solidFill>
@@ -4658,7 +3873,7 @@
               <a:t>Referencia</a:t>
             </a:r>
             <a:r>
-              <a:rPr lang="en-CA" dirty="0">
+              <a:rPr lang="en-CA">
                 <a:solidFill>
                   <a:srgbClr val="0070C0"/>
                 </a:solidFill>
@@ -4717,28 +3932,28 @@
           <a:p>
             <a:pPr algn="l"/>
             <a:br>
-              <a:rPr lang="en-CA" dirty="0"/>
+              <a:rPr lang="en-CA"/>
             </a:br>
             <a:r>
-              <a:rPr lang="en-CA" sz="4000" dirty="0"/>
+              <a:rPr lang="en-CA" sz="4000"/>
               <a:t>Tipo de </a:t>
             </a:r>
             <a:r>
-              <a:rPr lang="en-CA" sz="4000" dirty="0" err="1"/>
+              <a:rPr lang="en-CA" sz="4000" err="1"/>
               <a:t>transformación</a:t>
             </a:r>
             <a:r>
-              <a:rPr lang="en-CA" sz="4000" dirty="0"/>
+              <a:rPr lang="en-CA" sz="4000"/>
               <a:t> de </a:t>
             </a:r>
             <a:r>
-              <a:rPr lang="en-CA" sz="4000" dirty="0" err="1"/>
+              <a:rPr lang="en-CA" sz="4000" err="1"/>
               <a:t>resultados</a:t>
             </a:r>
             <a:br>
-              <a:rPr lang="en-CA" dirty="0"/>
+              <a:rPr lang="en-CA"/>
             </a:br>
-            <a:endParaRPr lang="en-CA" dirty="0"/>
+            <a:endParaRPr lang="en-CA"/>
           </a:p>
         </p:txBody>
       </p:sp>
@@ -4761,122 +3976,122 @@
           <a:p>
             <a:pPr marL="285750" indent="-285750"/>
             <a:r>
-              <a:rPr lang="en-CA" dirty="0" err="1"/>
+              <a:rPr lang="en-CA" err="1"/>
               <a:t>Rígido</a:t>
             </a:r>
-            <a:endParaRPr lang="en-CA" dirty="0"/>
+            <a:endParaRPr lang="en-CA"/>
           </a:p>
           <a:p>
             <a:pPr marL="742950" lvl="1" indent="-285750"/>
             <a:r>
-              <a:rPr lang="en-CA" dirty="0" err="1"/>
+              <a:rPr lang="en-CA" err="1"/>
               <a:t>Translación</a:t>
             </a:r>
             <a:r>
-              <a:rPr lang="en-CA" dirty="0"/>
+              <a:rPr lang="en-CA"/>
               <a:t> + </a:t>
             </a:r>
             <a:r>
-              <a:rPr lang="en-CA" dirty="0" err="1"/>
+              <a:rPr lang="en-CA" err="1"/>
               <a:t>Rotación</a:t>
             </a:r>
-            <a:endParaRPr lang="en-CA" dirty="0"/>
+            <a:endParaRPr lang="en-CA"/>
           </a:p>
           <a:p>
             <a:pPr marL="742950" lvl="1" indent="-285750"/>
             <a:r>
-              <a:rPr lang="en-CA" dirty="0" err="1"/>
+              <a:rPr lang="en-CA" err="1"/>
               <a:t>Comunmente</a:t>
             </a:r>
             <a:r>
-              <a:rPr lang="en-CA" dirty="0"/>
+              <a:rPr lang="en-CA"/>
               <a:t> </a:t>
             </a:r>
             <a:r>
-              <a:rPr lang="en-CA" dirty="0" err="1"/>
+              <a:rPr lang="en-CA" err="1"/>
               <a:t>usado</a:t>
             </a:r>
             <a:r>
-              <a:rPr lang="en-CA" dirty="0"/>
+              <a:rPr lang="en-CA"/>
               <a:t>, </a:t>
             </a:r>
             <a:r>
-              <a:rPr lang="en-CA" dirty="0" err="1"/>
+              <a:rPr lang="en-CA" err="1"/>
               <a:t>debido</a:t>
             </a:r>
             <a:r>
-              <a:rPr lang="en-CA" dirty="0"/>
+              <a:rPr lang="en-CA"/>
               <a:t> a que </a:t>
             </a:r>
             <a:r>
-              <a:rPr lang="en-CA" dirty="0" err="1"/>
+              <a:rPr lang="en-CA" err="1"/>
               <a:t>los</a:t>
             </a:r>
             <a:r>
-              <a:rPr lang="en-CA" dirty="0"/>
+              <a:rPr lang="en-CA"/>
               <a:t> </a:t>
             </a:r>
             <a:r>
-              <a:rPr lang="en-CA" dirty="0" err="1"/>
+              <a:rPr lang="en-CA" err="1"/>
               <a:t>objectos</a:t>
             </a:r>
             <a:r>
-              <a:rPr lang="en-CA" dirty="0"/>
+              <a:rPr lang="en-CA"/>
               <a:t> no </a:t>
             </a:r>
             <a:r>
-              <a:rPr lang="en-CA" dirty="0" err="1"/>
+              <a:rPr lang="en-CA" err="1"/>
               <a:t>cambian</a:t>
             </a:r>
             <a:r>
-              <a:rPr lang="en-CA" dirty="0"/>
+              <a:rPr lang="en-CA"/>
               <a:t> de </a:t>
             </a:r>
             <a:r>
-              <a:rPr lang="en-CA" dirty="0" err="1"/>
+              <a:rPr lang="en-CA" err="1"/>
               <a:t>tamaño</a:t>
             </a:r>
-            <a:endParaRPr lang="en-CA" dirty="0"/>
+            <a:endParaRPr lang="en-CA"/>
           </a:p>
           <a:p>
             <a:pPr marL="285750" indent="-285750"/>
             <a:r>
-              <a:rPr lang="en-CA" dirty="0" err="1"/>
+              <a:rPr lang="en-CA" err="1"/>
               <a:t>Similitud</a:t>
             </a:r>
-            <a:endParaRPr lang="en-CA" dirty="0"/>
+            <a:endParaRPr lang="en-CA"/>
           </a:p>
           <a:p>
             <a:pPr marL="742950" lvl="1" indent="-285750"/>
             <a:r>
-              <a:rPr lang="en-CA" dirty="0" err="1"/>
+              <a:rPr lang="en-CA" err="1"/>
               <a:t>Translación</a:t>
             </a:r>
             <a:r>
-              <a:rPr lang="en-CA" dirty="0"/>
+              <a:rPr lang="en-CA"/>
               <a:t> + </a:t>
             </a:r>
             <a:r>
-              <a:rPr lang="en-CA" dirty="0" err="1"/>
+              <a:rPr lang="en-CA" err="1"/>
               <a:t>Rotación</a:t>
             </a:r>
             <a:r>
-              <a:rPr lang="en-CA" dirty="0"/>
+              <a:rPr lang="en-CA"/>
               <a:t> + </a:t>
             </a:r>
             <a:r>
-              <a:rPr lang="en-CA" dirty="0" err="1"/>
+              <a:rPr lang="en-CA" err="1"/>
               <a:t>Escalado</a:t>
             </a:r>
             <a:r>
-              <a:rPr lang="en-CA" dirty="0"/>
+              <a:rPr lang="en-CA"/>
               <a:t> </a:t>
             </a:r>
           </a:p>
           <a:p>
             <a:pPr marL="742950" lvl="1" indent="-285750"/>
             <a:r>
-              <a:rPr lang="es-MX" b="0" i="0" u="none" strike="noStrike" dirty="0">
+              <a:rPr lang="es-MX" b="0" i="0" u="none" strike="noStrike">
                 <a:solidFill>
                   <a:srgbClr val="000000"/>
                 </a:solidFill>
@@ -4888,70 +4103,70 @@
           <a:p>
             <a:pPr algn="l"/>
             <a:r>
-              <a:rPr lang="en-CA" dirty="0" err="1"/>
+              <a:rPr lang="en-CA" err="1"/>
               <a:t>Deformación</a:t>
             </a:r>
             <a:r>
-              <a:rPr lang="en-CA" dirty="0"/>
+              <a:rPr lang="en-CA"/>
               <a:t> </a:t>
             </a:r>
           </a:p>
           <a:p>
             <a:pPr marL="742950" lvl="1" indent="-285750"/>
             <a:r>
-              <a:rPr lang="en-CA" dirty="0"/>
+              <a:rPr lang="en-CA"/>
               <a:t>Splines, etc.</a:t>
             </a:r>
           </a:p>
           <a:p>
             <a:pPr marL="742950" lvl="1" indent="-285750"/>
             <a:r>
-              <a:rPr lang="en-CA" dirty="0"/>
+              <a:rPr lang="en-CA"/>
               <a:t>Se </a:t>
             </a:r>
             <a:r>
-              <a:rPr lang="en-CA" dirty="0" err="1"/>
+              <a:rPr lang="en-CA" err="1"/>
               <a:t>utilizan</a:t>
             </a:r>
             <a:r>
-              <a:rPr lang="en-CA" dirty="0"/>
+              <a:rPr lang="en-CA"/>
               <a:t> para </a:t>
             </a:r>
             <a:r>
-              <a:rPr lang="en-CA" dirty="0" err="1"/>
+              <a:rPr lang="en-CA" err="1"/>
               <a:t>modelar</a:t>
             </a:r>
             <a:r>
-              <a:rPr lang="en-CA" dirty="0"/>
+              <a:rPr lang="en-CA"/>
               <a:t> </a:t>
             </a:r>
             <a:r>
-              <a:rPr lang="en-CA" dirty="0" err="1"/>
+              <a:rPr lang="en-CA" err="1"/>
               <a:t>deformaciones</a:t>
             </a:r>
             <a:r>
-              <a:rPr lang="en-CA" dirty="0"/>
+              <a:rPr lang="en-CA"/>
               <a:t> de </a:t>
             </a:r>
             <a:r>
-              <a:rPr lang="en-CA" dirty="0" err="1"/>
+              <a:rPr lang="en-CA" err="1"/>
               <a:t>tejidos</a:t>
             </a:r>
             <a:r>
-              <a:rPr lang="en-CA" dirty="0"/>
+              <a:rPr lang="en-CA"/>
               <a:t> </a:t>
             </a:r>
             <a:r>
-              <a:rPr lang="en-CA" dirty="0" err="1"/>
+              <a:rPr lang="en-CA" err="1"/>
               <a:t>blandos</a:t>
             </a:r>
             <a:r>
-              <a:rPr lang="en-CA" dirty="0"/>
+              <a:rPr lang="en-CA"/>
               <a:t>.</a:t>
             </a:r>
           </a:p>
           <a:p>
-            <a:endParaRPr lang="en-CA" dirty="0"/>
+            <a:endParaRPr lang="en-CA"/>
           </a:p>
         </p:txBody>
       </p:sp>
@@ -5055,7 +4270,7 @@
           <a:p>
             <a:pPr algn="ctr"/>
             <a:r>
-              <a:rPr lang="en-CA" dirty="0"/>
+              <a:rPr lang="en-CA"/>
               <a:t>RMSE = 4.8</a:t>
             </a:r>
           </a:p>
@@ -5085,7 +4300,7 @@
           <a:p>
             <a:pPr algn="ctr"/>
             <a:r>
-              <a:rPr lang="en-CA" dirty="0"/>
+              <a:rPr lang="en-CA"/>
               <a:t>RMSE = 4.2</a:t>
             </a:r>
           </a:p>
@@ -5115,7 +4330,7 @@
           <a:p>
             <a:pPr algn="ctr"/>
             <a:r>
-              <a:rPr lang="en-CA" dirty="0"/>
+              <a:rPr lang="en-CA"/>
               <a:t>RMSE = 0.0</a:t>
             </a:r>
           </a:p>
@@ -5145,10 +4360,10 @@
           <a:p>
             <a:pPr algn="ctr"/>
             <a:r>
-              <a:rPr lang="en-CA" sz="2400" dirty="0" err="1"/>
+              <a:rPr lang="en-CA" sz="2400" err="1"/>
               <a:t>Rígido</a:t>
             </a:r>
-            <a:endParaRPr lang="en-CA" sz="2400" dirty="0"/>
+            <a:endParaRPr lang="en-CA" sz="2400"/>
           </a:p>
         </p:txBody>
       </p:sp>
@@ -5176,10 +4391,10 @@
           <a:p>
             <a:pPr algn="ctr"/>
             <a:r>
-              <a:rPr lang="en-CA" sz="2400" dirty="0" err="1"/>
+              <a:rPr lang="en-CA" sz="2400" err="1"/>
               <a:t>Similitud</a:t>
             </a:r>
-            <a:endParaRPr lang="en-CA" sz="2400" dirty="0"/>
+            <a:endParaRPr lang="en-CA" sz="2400"/>
           </a:p>
         </p:txBody>
       </p:sp>
@@ -5207,10 +4422,10 @@
           <a:p>
             <a:pPr algn="ctr"/>
             <a:r>
-              <a:rPr lang="en-CA" sz="2400" dirty="0" err="1"/>
+              <a:rPr lang="en-CA" sz="2400" err="1"/>
               <a:t>Deformación</a:t>
             </a:r>
-            <a:endParaRPr lang="en-CA" sz="2400" dirty="0"/>
+            <a:endParaRPr lang="en-CA" sz="2400"/>
           </a:p>
         </p:txBody>
       </p:sp>
@@ -5333,7 +4548,7 @@
           <a:lstStyle/>
           <a:p>
             <a:r>
-              <a:rPr lang="es-MX" b="0" i="0" u="none" strike="noStrike" dirty="0">
+              <a:rPr lang="es-MX" b="0" i="0" u="none" strike="noStrike">
                 <a:solidFill>
                   <a:srgbClr val="000000"/>
                 </a:solidFill>
@@ -5342,7 +4557,7 @@
               <a:t>Desplazamiento fiducial</a:t>
             </a:r>
             <a:r>
-              <a:rPr lang="en-CA" dirty="0"/>
+              <a:rPr lang="en-CA"/>
               <a:t>:</a:t>
             </a:r>
           </a:p>
@@ -5522,32 +4737,32 @@
           <a:lstStyle/>
           <a:p>
             <a:br>
-              <a:rPr lang="en-US" dirty="0"/>
+              <a:rPr lang="en-US"/>
             </a:br>
             <a:r>
-              <a:rPr lang="en-US" dirty="0" err="1"/>
+              <a:rPr lang="en-US" err="1"/>
               <a:t>Cargar</a:t>
             </a:r>
             <a:r>
-              <a:rPr lang="en-US" dirty="0"/>
+              <a:rPr lang="en-US"/>
               <a:t> </a:t>
             </a:r>
             <a:r>
-              <a:rPr lang="en-US" dirty="0" err="1"/>
+              <a:rPr lang="en-US" err="1"/>
               <a:t>datos</a:t>
             </a:r>
             <a:r>
-              <a:rPr lang="en-US" dirty="0"/>
+              <a:rPr lang="en-US"/>
               <a:t> de </a:t>
             </a:r>
             <a:r>
-              <a:rPr lang="en-US" dirty="0" err="1"/>
+              <a:rPr lang="en-US" err="1"/>
               <a:t>ejemplo</a:t>
             </a:r>
             <a:br>
-              <a:rPr lang="en-US" dirty="0"/>
+              <a:rPr lang="en-US"/>
             </a:br>
-            <a:endParaRPr lang="en-US" dirty="0"/>
+            <a:endParaRPr lang="en-US"/>
           </a:p>
         </p:txBody>
       </p:sp>
@@ -5567,41 +4782,41 @@
           <a:lstStyle/>
           <a:p>
             <a:r>
-              <a:rPr lang="en-US" dirty="0" err="1"/>
+              <a:rPr lang="en-US" err="1"/>
               <a:t>Cargar</a:t>
             </a:r>
             <a:r>
-              <a:rPr lang="en-US" dirty="0"/>
+              <a:rPr lang="en-US"/>
               <a:t> </a:t>
             </a:r>
             <a:r>
-              <a:rPr lang="en-US" dirty="0" err="1"/>
+              <a:rPr lang="en-US" err="1"/>
               <a:t>escena</a:t>
             </a:r>
             <a:r>
-              <a:rPr lang="en-US" dirty="0"/>
+              <a:rPr lang="en-US"/>
               <a:t>: </a:t>
             </a:r>
             <a:r>
-              <a:rPr lang="en-US" b="1" dirty="0" err="1"/>
+              <a:rPr lang="en-US" b="1" err="1"/>
               <a:t>SlicerIGT</a:t>
             </a:r>
             <a:r>
-              <a:rPr lang="en-US" b="1" dirty="0"/>
+              <a:rPr lang="en-US" b="1"/>
               <a:t>-Datos/</a:t>
             </a:r>
             <a:r>
-              <a:rPr lang="en-US" b="1" dirty="0" err="1"/>
+              <a:rPr lang="en-US" b="1" err="1"/>
               <a:t>Skull_GroundTruthLandmarks.mrb</a:t>
             </a:r>
             <a:r>
-              <a:rPr lang="en-US" b="1" dirty="0"/>
+              <a:rPr lang="en-US" b="1"/>
               <a:t> </a:t>
             </a:r>
           </a:p>
           <a:p>
             <a:r>
-              <a:rPr lang="es-MX" b="0" i="0" u="none" strike="noStrike" dirty="0">
+              <a:rPr lang="es-MX" b="0" i="0" u="none" strike="noStrike">
                 <a:solidFill>
                   <a:srgbClr val="000000"/>
                 </a:solidFill>
@@ -5610,22 +4825,22 @@
               <a:t>Cargar transformación adicional</a:t>
             </a:r>
             <a:r>
-              <a:rPr lang="en-US" dirty="0"/>
+              <a:rPr lang="en-US"/>
               <a:t>: </a:t>
             </a:r>
             <a:r>
-              <a:rPr lang="en-US" b="1" dirty="0" err="1"/>
+              <a:rPr lang="en-US" b="1" err="1"/>
               <a:t>SlicerIGT</a:t>
             </a:r>
             <a:r>
-              <a:rPr lang="en-US" b="1" dirty="0"/>
+              <a:rPr lang="en-US" b="1"/>
               <a:t>-Datos/Skull_StylusTipToStylus.h5 </a:t>
             </a:r>
           </a:p>
           <a:p>
             <a:pPr algn="l"/>
             <a:r>
-              <a:rPr lang="es-MX" b="0" i="0" u="none" strike="noStrike" dirty="0">
+              <a:rPr lang="es-MX" b="0" i="0" u="none" strike="noStrike">
                 <a:solidFill>
                   <a:srgbClr val="000000"/>
                 </a:solidFill>
@@ -5637,7 +4852,7 @@
           <a:p>
             <a:pPr algn="l"/>
             <a:r>
-              <a:rPr lang="es-MX" b="0" i="0" u="none" strike="noStrike" dirty="0">
+              <a:rPr lang="es-MX" b="0" i="0" u="none" strike="noStrike">
                 <a:solidFill>
                   <a:srgbClr val="000000"/>
                 </a:solidFill>
@@ -5645,7 +4860,7 @@
               </a:rPr>
               <a:t>Configurar la jerarquía de transformación del lápiz óptico en el módulo Datos:</a:t>
             </a:r>
-            <a:endParaRPr lang="es-MX" dirty="0">
+            <a:endParaRPr lang="es-MX">
               <a:solidFill>
                 <a:srgbClr val="000000"/>
               </a:solidFill>
@@ -5655,7 +4870,7 @@
             <a:pPr marL="0" indent="0" algn="l">
               <a:buNone/>
             </a:pPr>
-            <a:endParaRPr lang="es-MX" b="0" i="0" u="none" strike="noStrike" dirty="0">
+            <a:endParaRPr lang="es-MX" b="0" i="0" u="none" strike="noStrike">
               <a:solidFill>
                 <a:srgbClr val="000000"/>
               </a:solidFill>
@@ -5789,32 +5004,32 @@
           <a:lstStyle/>
           <a:p>
             <a:br>
-              <a:rPr lang="en-CA" dirty="0"/>
+              <a:rPr lang="en-CA"/>
             </a:br>
             <a:r>
-              <a:rPr lang="en-CA" dirty="0" err="1"/>
+              <a:rPr lang="en-CA" err="1"/>
               <a:t>Crear</a:t>
             </a:r>
             <a:r>
-              <a:rPr lang="en-CA" dirty="0"/>
+              <a:rPr lang="en-CA"/>
               <a:t> </a:t>
             </a:r>
             <a:r>
-              <a:rPr lang="en-CA" dirty="0" err="1"/>
+              <a:rPr lang="en-CA" err="1"/>
               <a:t>nodos</a:t>
             </a:r>
             <a:r>
-              <a:rPr lang="en-CA" dirty="0"/>
+              <a:rPr lang="en-CA"/>
               <a:t> de entrada y </a:t>
             </a:r>
             <a:r>
-              <a:rPr lang="en-CA" dirty="0" err="1"/>
+              <a:rPr lang="en-CA" err="1"/>
               <a:t>salida</a:t>
             </a:r>
             <a:br>
-              <a:rPr lang="en-CA" dirty="0"/>
+              <a:rPr lang="en-CA"/>
             </a:br>
-            <a:endParaRPr lang="en-CA" dirty="0"/>
+            <a:endParaRPr lang="en-CA"/>
           </a:p>
         </p:txBody>
       </p:sp>
@@ -5841,49 +5056,49 @@
           <a:lstStyle/>
           <a:p>
             <a:r>
-              <a:rPr lang="en-CA" dirty="0" err="1"/>
+              <a:rPr lang="en-CA" err="1"/>
               <a:t>Seleccionar</a:t>
             </a:r>
             <a:r>
-              <a:rPr lang="en-CA" dirty="0"/>
+              <a:rPr lang="en-CA"/>
               <a:t> </a:t>
             </a:r>
             <a:r>
-              <a:rPr lang="en-CA" dirty="0" err="1"/>
+              <a:rPr lang="en-CA" err="1"/>
               <a:t>el</a:t>
             </a:r>
             <a:r>
-              <a:rPr lang="en-CA" dirty="0"/>
+              <a:rPr lang="en-CA"/>
               <a:t> </a:t>
             </a:r>
             <a:r>
-              <a:rPr lang="en-CA" dirty="0" err="1"/>
+              <a:rPr lang="en-CA" err="1"/>
               <a:t>módulo</a:t>
             </a:r>
             <a:r>
-              <a:rPr lang="en-CA" dirty="0"/>
+              <a:rPr lang="en-CA"/>
               <a:t> </a:t>
             </a:r>
             <a:r>
-              <a:rPr lang="en-CA" b="1" dirty="0"/>
+              <a:rPr lang="en-CA" b="1"/>
               <a:t>IGT / </a:t>
             </a:r>
             <a:r>
-              <a:rPr lang="en-CA" b="1" dirty="0" err="1"/>
+              <a:rPr lang="en-CA" b="1" err="1"/>
               <a:t>Asistente</a:t>
             </a:r>
             <a:r>
-              <a:rPr lang="en-CA" b="1" dirty="0"/>
+              <a:rPr lang="en-CA" b="1"/>
               <a:t> de Registro Fiducial</a:t>
             </a:r>
-            <a:endParaRPr lang="en-CA" dirty="0">
+            <a:endParaRPr lang="en-CA">
               <a:ea typeface="Calibri" panose="020F0502020204030204"/>
               <a:cs typeface="Calibri" panose="020F0502020204030204"/>
             </a:endParaRPr>
           </a:p>
           <a:p>
             <a:r>
-              <a:rPr lang="es-MX" b="0" i="0" u="none" strike="noStrike" dirty="0">
+              <a:rPr lang="es-MX" b="0" i="0" u="none" strike="noStrike">
                 <a:solidFill>
                   <a:srgbClr val="000000"/>
                 </a:solidFill>
@@ -5892,7 +5107,7 @@
               <a:t>Crear </a:t>
             </a:r>
             <a:r>
-              <a:rPr lang="es-MX" i="1" dirty="0">
+              <a:rPr lang="es-MX" i="1">
                 <a:solidFill>
                   <a:srgbClr val="000000"/>
                 </a:solidFill>
@@ -5900,7 +5115,7 @@
               <a:t>De</a:t>
             </a:r>
             <a:r>
-              <a:rPr lang="es-MX" b="0" i="1" u="none" strike="noStrike" dirty="0">
+              <a:rPr lang="es-MX" b="0" i="1" u="none" strike="noStrike">
                 <a:solidFill>
                   <a:srgbClr val="000000"/>
                 </a:solidFill>
@@ -5909,7 +5124,7 @@
               <a:t> </a:t>
             </a:r>
             <a:r>
-              <a:rPr lang="es-MX" i="1" dirty="0">
+              <a:rPr lang="es-MX" i="1">
                 <a:solidFill>
                   <a:srgbClr val="000000"/>
                 </a:solidFill>
@@ -5917,7 +5132,7 @@
               <a:t>los </a:t>
             </a:r>
             <a:r>
-              <a:rPr lang="es-MX" b="0" i="1" u="none" strike="noStrike" dirty="0" err="1">
+              <a:rPr lang="es-MX" b="0" i="1" u="none" strike="noStrike" err="1">
                 <a:solidFill>
                   <a:srgbClr val="000000"/>
                 </a:solidFill>
@@ -5926,7 +5141,7 @@
               <a:t>fiduciales</a:t>
             </a:r>
             <a:r>
-              <a:rPr lang="es-MX" b="0" i="1" u="none" strike="noStrike" dirty="0">
+              <a:rPr lang="es-MX" b="0" i="1" u="none" strike="noStrike">
                 <a:solidFill>
                   <a:srgbClr val="000000"/>
                 </a:solidFill>
@@ -5935,7 +5150,7 @@
               <a:t> </a:t>
             </a:r>
             <a:r>
-              <a:rPr lang="es-MX" b="0" i="0" u="none" strike="noStrike" dirty="0">
+              <a:rPr lang="es-MX" b="0" i="0" u="none" strike="noStrike">
                 <a:solidFill>
                   <a:srgbClr val="000000"/>
                 </a:solidFill>
@@ -5944,71 +5159,71 @@
               <a:t>y nombrar la lista</a:t>
             </a:r>
             <a:r>
-              <a:rPr lang="en-CA" dirty="0"/>
+              <a:rPr lang="en-CA"/>
               <a:t>"</a:t>
             </a:r>
             <a:r>
-              <a:rPr lang="en-CA" b="1" dirty="0" err="1"/>
+              <a:rPr lang="en-CA" b="1" err="1"/>
               <a:t>ReferenceFiducials</a:t>
             </a:r>
             <a:r>
-              <a:rPr lang="en-CA" dirty="0"/>
+              <a:rPr lang="en-CA"/>
               <a:t>"</a:t>
             </a:r>
-            <a:endParaRPr lang="en-CA" dirty="0">
+            <a:endParaRPr lang="en-CA">
               <a:ea typeface="Calibri"/>
               <a:cs typeface="Calibri"/>
             </a:endParaRPr>
           </a:p>
           <a:p>
             <a:r>
-              <a:rPr lang="en-CA" dirty="0"/>
+              <a:rPr lang="en-CA"/>
               <a:t>Crear A </a:t>
             </a:r>
             <a:r>
-              <a:rPr lang="en-CA" dirty="0" err="1"/>
+              <a:rPr lang="en-CA" err="1"/>
               <a:t>los</a:t>
             </a:r>
             <a:r>
-              <a:rPr lang="en-CA" dirty="0"/>
+              <a:rPr lang="en-CA"/>
               <a:t> </a:t>
             </a:r>
             <a:r>
-              <a:rPr lang="en-CA" dirty="0" err="1"/>
+              <a:rPr lang="en-CA" err="1"/>
               <a:t>fiduciaros</a:t>
             </a:r>
             <a:r>
-              <a:rPr lang="en-CA" dirty="0"/>
+              <a:rPr lang="en-CA"/>
               <a:t> y </a:t>
             </a:r>
             <a:r>
-              <a:rPr lang="en-CA" dirty="0" err="1"/>
+              <a:rPr lang="en-CA" err="1"/>
               <a:t>nombrar</a:t>
             </a:r>
             <a:r>
-              <a:rPr lang="en-CA" dirty="0"/>
+              <a:rPr lang="en-CA"/>
               <a:t> la </a:t>
             </a:r>
             <a:r>
-              <a:rPr lang="en-CA" dirty="0" err="1"/>
+              <a:rPr lang="en-CA" err="1"/>
               <a:t>lista</a:t>
             </a:r>
             <a:r>
-              <a:rPr lang="en-CA" dirty="0"/>
+              <a:rPr lang="en-CA"/>
               <a:t> "</a:t>
             </a:r>
             <a:r>
-              <a:rPr lang="en-CA" b="1" dirty="0" err="1"/>
+              <a:rPr lang="en-CA" b="1" err="1"/>
               <a:t>RasFiducials</a:t>
             </a:r>
             <a:r>
-              <a:rPr lang="en-CA" dirty="0"/>
+              <a:rPr lang="en-CA"/>
               <a:t>"</a:t>
             </a:r>
           </a:p>
           <a:p>
             <a:r>
-              <a:rPr lang="es-MX" b="0" i="0" u="none" strike="noStrike" dirty="0">
+              <a:rPr lang="es-MX" b="0" i="0" u="none" strike="noStrike">
                 <a:solidFill>
                   <a:srgbClr val="000000"/>
                 </a:solidFill>
@@ -6017,7 +5232,7 @@
               <a:t>Crear </a:t>
             </a:r>
             <a:r>
-              <a:rPr lang="es-MX" b="0" i="1" u="none" strike="noStrike" dirty="0">
+              <a:rPr lang="es-MX" b="0" i="1" u="none" strike="noStrike">
                 <a:solidFill>
                   <a:srgbClr val="000000"/>
                 </a:solidFill>
@@ -6026,7 +5241,7 @@
               <a:t>transformación de resultados </a:t>
             </a:r>
             <a:r>
-              <a:rPr lang="es-MX" b="0" i="0" u="none" strike="noStrike" dirty="0">
+              <a:rPr lang="es-MX" b="0" i="0" u="none" strike="noStrike">
                 <a:solidFill>
                   <a:srgbClr val="000000"/>
                 </a:solidFill>
@@ -6035,20 +5250,20 @@
               <a:t>como </a:t>
             </a:r>
             <a:r>
-              <a:rPr lang="en-CA" dirty="0"/>
+              <a:rPr lang="en-CA"/>
               <a:t>"</a:t>
             </a:r>
             <a:r>
-              <a:rPr lang="en-CA" b="1" dirty="0" err="1"/>
+              <a:rPr lang="en-CA" b="1" err="1"/>
               <a:t>ReferenceToRas</a:t>
             </a:r>
             <a:r>
-              <a:rPr lang="en-CA" dirty="0"/>
+              <a:rPr lang="en-CA"/>
               <a:t>"</a:t>
             </a:r>
           </a:p>
           <a:p>
-            <a:endParaRPr lang="en-CA" dirty="0"/>
+            <a:endParaRPr lang="en-CA"/>
           </a:p>
         </p:txBody>
       </p:sp>
@@ -6316,52 +5531,52 @@
           <a:p>
             <a:pPr algn="l"/>
             <a:br>
-              <a:rPr lang="en-CA" dirty="0"/>
+              <a:rPr lang="en-CA"/>
             </a:br>
             <a:r>
-              <a:rPr lang="en-CA" dirty="0" err="1"/>
+              <a:rPr lang="en-CA" err="1"/>
               <a:t>Configurar</a:t>
             </a:r>
             <a:r>
-              <a:rPr lang="en-CA" dirty="0"/>
+              <a:rPr lang="en-CA"/>
               <a:t> </a:t>
             </a:r>
             <a:r>
-              <a:rPr lang="en-CA" dirty="0" err="1"/>
+              <a:rPr lang="en-CA" err="1"/>
               <a:t>el</a:t>
             </a:r>
             <a:r>
-              <a:rPr lang="en-CA" dirty="0"/>
+              <a:rPr lang="en-CA"/>
               <a:t> </a:t>
             </a:r>
             <a:r>
-              <a:rPr lang="en-CA" dirty="0" err="1"/>
+              <a:rPr lang="en-CA" err="1"/>
               <a:t>lápiz</a:t>
             </a:r>
             <a:r>
-              <a:rPr lang="en-CA" dirty="0"/>
+              <a:rPr lang="en-CA"/>
               <a:t> </a:t>
             </a:r>
             <a:r>
-              <a:rPr lang="en-CA" dirty="0" err="1"/>
+              <a:rPr lang="en-CA" err="1"/>
               <a:t>óptico</a:t>
             </a:r>
             <a:r>
-              <a:rPr lang="en-CA" dirty="0"/>
+              <a:rPr lang="en-CA"/>
               <a:t> </a:t>
             </a:r>
             <a:r>
-              <a:rPr lang="en-CA" dirty="0" err="1"/>
+              <a:rPr lang="en-CA" err="1"/>
               <a:t>como</a:t>
             </a:r>
             <a:r>
-              <a:rPr lang="en-CA" dirty="0"/>
+              <a:rPr lang="en-CA"/>
               <a:t> entrada</a:t>
             </a:r>
             <a:br>
-              <a:rPr lang="en-CA" dirty="0"/>
+              <a:rPr lang="en-CA"/>
             </a:br>
-            <a:endParaRPr lang="en-CA" dirty="0"/>
+            <a:endParaRPr lang="en-CA"/>
           </a:p>
         </p:txBody>
       </p:sp>
@@ -6388,7 +5603,7 @@
           <a:lstStyle/>
           <a:p>
             <a:r>
-              <a:rPr lang="es-MX" b="0" i="0" u="none" strike="noStrike" dirty="0">
+              <a:rPr lang="es-MX" b="0" i="0" u="none" strike="noStrike">
                 <a:solidFill>
                   <a:srgbClr val="000000"/>
                 </a:solidFill>
@@ -6397,7 +5612,7 @@
               <a:t>Expandir </a:t>
             </a:r>
             <a:r>
-              <a:rPr lang="es-MX" b="1" dirty="0">
+              <a:rPr lang="es-MX" b="1">
                 <a:solidFill>
                   <a:srgbClr val="000000"/>
                 </a:solidFill>
@@ -6405,7 +5620,7 @@
               <a:t>Colocar </a:t>
             </a:r>
             <a:r>
-              <a:rPr lang="es-MX" b="1" dirty="0" err="1">
+              <a:rPr lang="es-MX" b="1" err="1">
                 <a:solidFill>
                   <a:srgbClr val="000000"/>
                 </a:solidFill>
@@ -6413,7 +5628,7 @@
               <a:t>fiduciales</a:t>
             </a:r>
             <a:r>
-              <a:rPr lang="es-MX" b="1" dirty="0">
+              <a:rPr lang="es-MX" b="1">
                 <a:solidFill>
                   <a:srgbClr val="000000"/>
                 </a:solidFill>
@@ -6421,7 +5636,7 @@
               <a:t> mediante transformaciones</a:t>
             </a:r>
             <a:r>
-              <a:rPr lang="es-MX" b="1" i="0" u="none" strike="noStrike" dirty="0">
+              <a:rPr lang="es-MX" b="1" i="0" u="none" strike="noStrike">
                 <a:solidFill>
                   <a:srgbClr val="000000"/>
                 </a:solidFill>
@@ -6430,7 +5645,7 @@
               <a:t> </a:t>
             </a:r>
             <a:r>
-              <a:rPr lang="es-MX" b="0" i="0" u="none" strike="noStrike" dirty="0">
+              <a:rPr lang="es-MX" b="0" i="0" u="none" strike="noStrike">
                 <a:solidFill>
                   <a:srgbClr val="000000"/>
                 </a:solidFill>
@@ -6442,7 +5657,7 @@
           <a:p>
             <a:pPr algn="l"/>
             <a:r>
-              <a:rPr lang="es-MX" b="0" i="0" u="none" strike="noStrike" dirty="0">
+              <a:rPr lang="es-MX" b="0" i="0" u="none" strike="noStrike">
                 <a:solidFill>
                   <a:srgbClr val="000000"/>
                 </a:solidFill>
@@ -6451,7 +5666,7 @@
               <a:t>Seleccione </a:t>
             </a:r>
             <a:r>
-              <a:rPr lang="es-MX" b="1" i="0" u="none" strike="noStrike" dirty="0">
+              <a:rPr lang="es-MX" b="1" i="0" u="none" strike="noStrike">
                 <a:solidFill>
                   <a:srgbClr val="000000"/>
                 </a:solidFill>
@@ -6460,7 +5675,7 @@
               <a:t>Skull_StylusTipToStylus </a:t>
             </a:r>
             <a:r>
-              <a:rPr lang="es-MX" b="0" i="0" u="none" strike="noStrike" dirty="0">
+              <a:rPr lang="es-MX" b="0" i="0" u="none" strike="noStrike">
                 <a:solidFill>
                   <a:srgbClr val="000000"/>
                 </a:solidFill>
@@ -6469,7 +5684,7 @@
               <a:t>para colocar </a:t>
             </a:r>
             <a:r>
-              <a:rPr lang="es-MX" i="1" dirty="0">
+              <a:rPr lang="es-MX" i="1">
                 <a:solidFill>
                   <a:srgbClr val="000000"/>
                 </a:solidFill>
@@ -6477,7 +5692,7 @@
               <a:t>De</a:t>
             </a:r>
             <a:r>
-              <a:rPr lang="es-MX" b="0" i="0" u="none" strike="noStrike" dirty="0">
+              <a:rPr lang="es-MX" b="0" i="0" u="none" strike="noStrike">
                 <a:solidFill>
                   <a:srgbClr val="000000"/>
                 </a:solidFill>
@@ -6486,7 +5701,7 @@
               <a:t> </a:t>
             </a:r>
             <a:r>
-              <a:rPr lang="es-MX" b="0" i="0" u="none" strike="noStrike" dirty="0" err="1">
+              <a:rPr lang="es-MX" b="0" i="0" u="none" strike="noStrike" err="1">
                 <a:solidFill>
                   <a:srgbClr val="000000"/>
                 </a:solidFill>
@@ -6495,7 +5710,7 @@
               <a:t>fiduciales</a:t>
             </a:r>
             <a:r>
-              <a:rPr lang="es-MX" b="0" i="0" u="none" strike="noStrike" dirty="0">
+              <a:rPr lang="es-MX" b="0" i="0" u="none" strike="noStrike">
                 <a:solidFill>
                   <a:srgbClr val="000000"/>
                 </a:solidFill>
@@ -6508,7 +5723,7 @@
             <a:pPr marL="0" indent="0" algn="l">
               <a:buNone/>
             </a:pPr>
-            <a:endParaRPr lang="es-MX" b="0" i="0" u="none" strike="noStrike" dirty="0">
+            <a:endParaRPr lang="es-MX" b="0" i="0" u="none" strike="noStrike">
               <a:solidFill>
                 <a:srgbClr val="000000"/>
               </a:solidFill>
@@ -6728,7 +5943,7 @@
           <a:p>
             <a:pPr algn="l"/>
             <a:r>
-              <a:rPr lang="es-MX" b="0" i="0" u="none" strike="noStrike" dirty="0">
+              <a:rPr lang="es-MX" b="0" i="0" u="none" strike="noStrike">
                 <a:solidFill>
                   <a:srgbClr val="000000"/>
                 </a:solidFill>
@@ -6737,7 +5952,7 @@
               <a:t>Al pulsar los botones </a:t>
             </a:r>
             <a:r>
-              <a:rPr lang="es-MX" b="1" i="0" u="none" strike="noStrike" dirty="0">
+              <a:rPr lang="es-MX" b="1" i="0" u="none" strike="noStrike">
                 <a:solidFill>
                   <a:srgbClr val="000000"/>
                 </a:solidFill>
@@ -6746,7 +5961,7 @@
               <a:t>“Colocar desde” </a:t>
             </a:r>
             <a:r>
-              <a:rPr lang="es-MX" b="0" i="0" u="none" strike="noStrike" dirty="0">
+              <a:rPr lang="es-MX" b="0" i="0" u="none" strike="noStrike">
                 <a:solidFill>
                   <a:srgbClr val="000000"/>
                 </a:solidFill>
@@ -6755,7 +5970,7 @@
               <a:t>o </a:t>
             </a:r>
             <a:r>
-              <a:rPr lang="es-MX" b="1" i="0" u="none" strike="noStrike" dirty="0">
+              <a:rPr lang="es-MX" b="1" i="0" u="none" strike="noStrike">
                 <a:solidFill>
                   <a:srgbClr val="000000"/>
                 </a:solidFill>
@@ -6764,7 +5979,7 @@
               <a:t>“Colocar hacia”</a:t>
             </a:r>
             <a:r>
-              <a:rPr lang="es-MX" b="0" i="0" u="none" strike="noStrike" dirty="0">
+              <a:rPr lang="es-MX" b="0" i="0" u="none" strike="noStrike">
                 <a:solidFill>
                   <a:srgbClr val="000000"/>
                 </a:solidFill>
@@ -6773,7 +5988,7 @@
               <a:t>, se crean fiduciales en el origen (0,0,0) del sistema de coordenadas </a:t>
             </a:r>
             <a:r>
-              <a:rPr lang="es-MX" b="0" i="1" u="none" strike="noStrike" dirty="0">
+              <a:rPr lang="es-MX" b="0" i="1" u="none" strike="noStrike">
                 <a:solidFill>
                   <a:srgbClr val="000000"/>
                 </a:solidFill>
@@ -6782,7 +5997,7 @@
               <a:t>Desde</a:t>
             </a:r>
             <a:r>
-              <a:rPr lang="es-MX" b="0" i="0" u="none" strike="noStrike" dirty="0">
+              <a:rPr lang="es-MX" b="0" i="0" u="none" strike="noStrike">
                 <a:solidFill>
                   <a:srgbClr val="000000"/>
                 </a:solidFill>
@@ -6794,7 +6009,7 @@
           <a:p>
             <a:pPr algn="l"/>
             <a:r>
-              <a:rPr lang="es-MX" b="0" i="0" u="none" strike="noStrike" dirty="0">
+              <a:rPr lang="es-MX" b="0" i="0" u="none" strike="noStrike">
                 <a:solidFill>
                   <a:srgbClr val="000000"/>
                 </a:solidFill>
@@ -6805,7 +6020,7 @@
           </a:p>
           <a:p>
             <a:pPr algn="l"/>
-            <a:endParaRPr lang="es-MX" b="0" i="0" u="none" strike="noStrike" dirty="0">
+            <a:endParaRPr lang="es-MX" b="0" i="0" u="none" strike="noStrike">
               <a:solidFill>
                 <a:srgbClr val="000000"/>
               </a:solidFill>
@@ -6897,27 +6112,27 @@
           <a:lstStyle/>
           <a:p>
             <a:r>
-              <a:rPr lang="en-CA" dirty="0" err="1"/>
+              <a:rPr lang="en-CA" err="1"/>
               <a:t>Cómo</a:t>
             </a:r>
             <a:r>
-              <a:rPr lang="en-CA" dirty="0"/>
+              <a:rPr lang="en-CA"/>
               <a:t> </a:t>
             </a:r>
             <a:r>
-              <a:rPr lang="en-CA" dirty="0" err="1"/>
+              <a:rPr lang="en-CA" err="1"/>
               <a:t>colocar</a:t>
             </a:r>
             <a:r>
-              <a:rPr lang="en-CA" dirty="0"/>
+              <a:rPr lang="en-CA"/>
               <a:t> </a:t>
             </a:r>
             <a:r>
-              <a:rPr lang="en-CA" dirty="0" err="1"/>
+              <a:rPr lang="en-CA" err="1"/>
               <a:t>fiduciales</a:t>
             </a:r>
             <a:r>
-              <a:rPr lang="en-CA" dirty="0"/>
+              <a:rPr lang="en-CA"/>
               <a:t>... </a:t>
             </a:r>
           </a:p>
@@ -7212,7 +6427,7 @@
             <a:lstStyle/>
             <a:p>
               <a:r>
-                <a:rPr lang="en-CA" b="1" dirty="0"/>
+                <a:rPr lang="en-CA" b="1"/>
                 <a:t>X</a:t>
               </a:r>
             </a:p>
@@ -7241,7 +6456,7 @@
             <a:lstStyle/>
             <a:p>
               <a:r>
-                <a:rPr lang="en-CA" b="1" dirty="0"/>
+                <a:rPr lang="en-CA" b="1"/>
                 <a:t>Y</a:t>
               </a:r>
             </a:p>
@@ -7270,7 +6485,7 @@
             <a:lstStyle/>
             <a:p>
               <a:r>
-                <a:rPr lang="en-CA" b="1" dirty="0"/>
+                <a:rPr lang="en-CA" b="1"/>
                 <a:t>Z</a:t>
               </a:r>
             </a:p>
@@ -7300,18 +6515,18 @@
           <a:lstStyle/>
           <a:p>
             <a:r>
-              <a:rPr lang="en-CA" b="1" dirty="0" err="1"/>
+              <a:rPr lang="en-CA" b="1" err="1"/>
               <a:t>Lápiz</a:t>
             </a:r>
             <a:r>
-              <a:rPr lang="en-CA" b="1" dirty="0"/>
+              <a:rPr lang="en-CA" b="1"/>
               <a:t> </a:t>
             </a:r>
             <a:r>
-              <a:rPr lang="en-CA" b="1" dirty="0" err="1"/>
+              <a:rPr lang="en-CA" b="1" err="1"/>
               <a:t>óptico</a:t>
             </a:r>
-            <a:endParaRPr lang="en-CA" b="1" dirty="0"/>
+            <a:endParaRPr lang="en-CA" b="1"/>
           </a:p>
         </p:txBody>
       </p:sp>
@@ -7460,7 +6675,7 @@
             <a:lstStyle/>
             <a:p>
               <a:r>
-                <a:rPr lang="en-CA" b="1" dirty="0"/>
+                <a:rPr lang="en-CA" b="1"/>
                 <a:t>X</a:t>
               </a:r>
             </a:p>
@@ -7489,7 +6704,7 @@
             <a:lstStyle/>
             <a:p>
               <a:r>
-                <a:rPr lang="en-CA" b="1" dirty="0"/>
+                <a:rPr lang="en-CA" b="1"/>
                 <a:t>Y</a:t>
               </a:r>
             </a:p>
@@ -7518,7 +6733,7 @@
             <a:lstStyle/>
             <a:p>
               <a:r>
-                <a:rPr lang="en-CA" b="1" dirty="0"/>
+                <a:rPr lang="en-CA" b="1"/>
                 <a:t>Z</a:t>
               </a:r>
             </a:p>
@@ -7548,34 +6763,34 @@
           <a:lstStyle/>
           <a:p>
             <a:r>
-              <a:rPr lang="en-CA" b="1" dirty="0"/>
+              <a:rPr lang="en-CA" b="1"/>
               <a:t>Punta del </a:t>
             </a:r>
             <a:r>
-              <a:rPr lang="en-CA" b="1" dirty="0" err="1"/>
+              <a:rPr lang="en-CA" b="1" err="1"/>
               <a:t>lápiz</a:t>
             </a:r>
             <a:r>
-              <a:rPr lang="en-CA" b="1" dirty="0"/>
+              <a:rPr lang="en-CA" b="1"/>
               <a:t> </a:t>
             </a:r>
             <a:r>
-              <a:rPr lang="en-CA" b="1" dirty="0" err="1"/>
+              <a:rPr lang="en-CA" b="1" err="1"/>
               <a:t>óptico</a:t>
             </a:r>
-            <a:endParaRPr lang="en-CA" b="1" dirty="0"/>
+            <a:endParaRPr lang="en-CA" b="1"/>
           </a:p>
           <a:p>
             <a:br>
-              <a:rPr lang="en-CA" b="1" dirty="0"/>
+              <a:rPr lang="en-CA" b="1"/>
             </a:br>
-            <a:endParaRPr lang="en-CA" b="1" dirty="0"/>
+            <a:endParaRPr lang="en-CA" b="1"/>
           </a:p>
           <a:p>
             <a:br>
-              <a:rPr lang="en-CA" b="1" dirty="0"/>
+              <a:rPr lang="en-CA" b="1"/>
             </a:br>
-            <a:endParaRPr lang="en-CA" b="1" dirty="0"/>
+            <a:endParaRPr lang="en-CA" b="1"/>
           </a:p>
         </p:txBody>
       </p:sp>
@@ -7651,14 +6866,14 @@
           <a:lstStyle/>
           <a:p>
             <a:r>
-              <a:rPr lang="en-CA" b="1" dirty="0" err="1">
+              <a:rPr lang="en-CA" b="1" err="1">
                 <a:solidFill>
                   <a:srgbClr val="0070C0"/>
                 </a:solidFill>
               </a:rPr>
               <a:t>StylusTipToStylus</a:t>
             </a:r>
-            <a:endParaRPr lang="en-CA" b="1" dirty="0">
+            <a:endParaRPr lang="en-CA" b="1">
               <a:solidFill>
                 <a:srgbClr val="0070C0"/>
               </a:solidFill>
@@ -7835,7 +7050,7 @@
             <a:lstStyle/>
             <a:p>
               <a:r>
-                <a:rPr lang="en-CA" b="1" dirty="0"/>
+                <a:rPr lang="en-CA" b="1"/>
                 <a:t>X</a:t>
               </a:r>
             </a:p>
@@ -7864,7 +7079,7 @@
             <a:lstStyle/>
             <a:p>
               <a:r>
-                <a:rPr lang="en-CA" b="1" dirty="0"/>
+                <a:rPr lang="en-CA" b="1"/>
                 <a:t>Y</a:t>
               </a:r>
             </a:p>
@@ -7893,7 +7108,7 @@
             <a:lstStyle/>
             <a:p>
               <a:r>
-                <a:rPr lang="en-CA" b="1" dirty="0"/>
+                <a:rPr lang="en-CA" b="1"/>
                 <a:t>Z</a:t>
               </a:r>
             </a:p>
@@ -7923,10 +7138,10 @@
           <a:lstStyle/>
           <a:p>
             <a:r>
-              <a:rPr lang="en-CA" b="1" dirty="0" err="1"/>
+              <a:rPr lang="en-CA" b="1" err="1"/>
               <a:t>Referencia</a:t>
             </a:r>
-            <a:endParaRPr lang="en-CA" b="1" dirty="0"/>
+            <a:endParaRPr lang="en-CA" b="1"/>
           </a:p>
         </p:txBody>
       </p:sp>
@@ -8002,7 +7217,7 @@
           <a:lstStyle/>
           <a:p>
             <a:r>
-              <a:rPr lang="en-CA" b="1" dirty="0" err="1">
+              <a:rPr lang="en-CA" b="1" err="1">
                 <a:solidFill>
                   <a:srgbClr val="0070C0"/>
                 </a:solidFill>
@@ -8010,7 +7225,7 @@
               <a:t>Lápiz</a:t>
             </a:r>
             <a:r>
-              <a:rPr lang="en-CA" b="1" dirty="0">
+              <a:rPr lang="en-CA" b="1">
                 <a:solidFill>
                   <a:srgbClr val="0070C0"/>
                 </a:solidFill>
@@ -8018,7 +7233,7 @@
               <a:t> </a:t>
             </a:r>
             <a:r>
-              <a:rPr lang="en-CA" b="1" dirty="0" err="1">
+              <a:rPr lang="en-CA" b="1" err="1">
                 <a:solidFill>
                   <a:srgbClr val="0070C0"/>
                 </a:solidFill>
@@ -8026,7 +7241,7 @@
               <a:t>óptico</a:t>
             </a:r>
             <a:r>
-              <a:rPr lang="en-CA" b="1" dirty="0">
+              <a:rPr lang="en-CA" b="1">
                 <a:solidFill>
                   <a:srgbClr val="0070C0"/>
                 </a:solidFill>
@@ -8034,14 +7249,14 @@
               <a:t> a </a:t>
             </a:r>
             <a:r>
-              <a:rPr lang="en-CA" b="1" dirty="0" err="1">
+              <a:rPr lang="en-CA" b="1" err="1">
                 <a:solidFill>
                   <a:srgbClr val="0070C0"/>
                 </a:solidFill>
               </a:rPr>
               <a:t>referencia</a:t>
             </a:r>
-            <a:endParaRPr lang="en-CA" b="1" dirty="0">
+            <a:endParaRPr lang="en-CA" b="1">
               <a:solidFill>
                 <a:srgbClr val="0070C0"/>
               </a:solidFill>
@@ -8049,13 +7264,13 @@
           </a:p>
           <a:p>
             <a:br>
-              <a:rPr lang="en-CA" b="1" dirty="0">
+              <a:rPr lang="en-CA" b="1">
                 <a:solidFill>
                   <a:srgbClr val="0070C0"/>
                 </a:solidFill>
               </a:rPr>
             </a:br>
-            <a:endParaRPr lang="en-CA" b="1" dirty="0">
+            <a:endParaRPr lang="en-CA" b="1">
               <a:solidFill>
                 <a:srgbClr val="0070C0"/>
               </a:solidFill>
@@ -8063,13 +7278,13 @@
           </a:p>
           <a:p>
             <a:br>
-              <a:rPr lang="en-CA" b="1" dirty="0">
+              <a:rPr lang="en-CA" b="1">
                 <a:solidFill>
                   <a:srgbClr val="0070C0"/>
                 </a:solidFill>
               </a:rPr>
             </a:br>
-            <a:endParaRPr lang="en-CA" b="1" dirty="0">
+            <a:endParaRPr lang="en-CA" b="1">
               <a:solidFill>
                 <a:srgbClr val="0070C0"/>
               </a:solidFill>
@@ -8149,7 +7364,7 @@
           <a:p>
             <a:pPr algn="l"/>
             <a:r>
-              <a:rPr lang="es-MX" sz="2400" b="0" i="0" u="none" strike="noStrike" dirty="0">
+              <a:rPr lang="es-MX" sz="2400" b="0" i="0" u="none" strike="noStrike">
                 <a:solidFill>
                   <a:srgbClr val="000000"/>
                 </a:solidFill>
@@ -8161,14 +7376,14 @@
           <a:p>
             <a:pPr algn="l"/>
             <a:br>
-              <a:rPr lang="es-MX" sz="2400" b="0" i="0" u="none" strike="noStrike" dirty="0">
+              <a:rPr lang="es-MX" sz="2400" b="0" i="0" u="none" strike="noStrike">
                 <a:solidFill>
                   <a:srgbClr val="000000"/>
                 </a:solidFill>
                 <a:effectLst/>
               </a:rPr>
             </a:br>
-            <a:endParaRPr lang="es-MX" sz="2400" b="0" i="0" u="none" strike="noStrike" dirty="0">
+            <a:endParaRPr lang="es-MX" sz="2400" b="0" i="0" u="none" strike="noStrike">
               <a:solidFill>
                 <a:srgbClr val="000000"/>
               </a:solidFill>
@@ -8177,9 +7392,9 @@
           </a:p>
           <a:p>
             <a:br>
-              <a:rPr lang="es-MX" sz="2400" dirty="0"/>
+              <a:rPr lang="es-MX" sz="2400"/>
             </a:br>
-            <a:endParaRPr lang="en-CA" sz="2400" dirty="0"/>
+            <a:endParaRPr lang="en-CA" sz="2400"/>
           </a:p>
         </p:txBody>
       </p:sp>
@@ -8357,7 +7572,7 @@
           <a:p>
             <a:pPr algn="l"/>
             <a:r>
-              <a:rPr lang="es-MX" sz="2400" b="0" i="0" u="none" strike="noStrike" dirty="0">
+              <a:rPr lang="es-MX" sz="2400" b="0" i="0" u="none" strike="noStrike">
                 <a:solidFill>
                   <a:srgbClr val="000000"/>
                 </a:solidFill>
@@ -8369,14 +7584,14 @@
           <a:p>
             <a:pPr algn="l"/>
             <a:br>
-              <a:rPr lang="es-MX" sz="2400" b="0" i="0" u="none" strike="noStrike" dirty="0">
+              <a:rPr lang="es-MX" sz="2400" b="0" i="0" u="none" strike="noStrike">
                 <a:solidFill>
                   <a:srgbClr val="000000"/>
                 </a:solidFill>
                 <a:effectLst/>
               </a:rPr>
             </a:br>
-            <a:endParaRPr lang="es-MX" sz="2400" b="0" i="0" u="none" strike="noStrike" dirty="0">
+            <a:endParaRPr lang="es-MX" sz="2400" b="0" i="0" u="none" strike="noStrike">
               <a:solidFill>
                 <a:srgbClr val="000000"/>
               </a:solidFill>
@@ -8385,9 +7600,9 @@
           </a:p>
           <a:p>
             <a:br>
-              <a:rPr lang="es-MX" sz="2400" dirty="0"/>
+              <a:rPr lang="es-MX" sz="2400"/>
             </a:br>
-            <a:endParaRPr lang="en-CA" sz="2400" dirty="0"/>
+            <a:endParaRPr lang="en-CA" sz="2400"/>
           </a:p>
         </p:txBody>
       </p:sp>
@@ -8539,35 +7754,35 @@
           <a:lstStyle/>
           <a:p>
             <a:r>
-              <a:rPr lang="en-CA" dirty="0" err="1"/>
+              <a:rPr lang="en-CA" err="1"/>
               <a:t>Rellene</a:t>
             </a:r>
             <a:r>
-              <a:rPr lang="en-CA" dirty="0"/>
+              <a:rPr lang="en-CA"/>
               <a:t> las </a:t>
             </a:r>
             <a:r>
-              <a:rPr lang="en-CA" dirty="0" err="1"/>
+              <a:rPr lang="en-CA" err="1"/>
               <a:t>listas</a:t>
             </a:r>
             <a:r>
-              <a:rPr lang="en-CA" dirty="0"/>
+              <a:rPr lang="en-CA"/>
               <a:t> “</a:t>
             </a:r>
             <a:r>
-              <a:rPr lang="en-CA" dirty="0" err="1"/>
+              <a:rPr lang="en-CA" err="1"/>
               <a:t>Desde</a:t>
             </a:r>
             <a:r>
-              <a:rPr lang="en-CA" dirty="0"/>
+              <a:rPr lang="en-CA"/>
               <a:t>” y “</a:t>
             </a:r>
             <a:r>
-              <a:rPr lang="en-CA" dirty="0" err="1"/>
+              <a:rPr lang="en-CA" err="1"/>
               <a:t>Hacia</a:t>
             </a:r>
             <a:r>
-              <a:rPr lang="en-CA" dirty="0"/>
+              <a:rPr lang="en-CA"/>
               <a:t>”.</a:t>
             </a:r>
           </a:p>
@@ -8592,7 +7807,7 @@
           <a:p>
             <a:pPr algn="l"/>
             <a:r>
-              <a:rPr lang="es-MX" b="0" i="0" u="none" strike="noStrike" dirty="0">
+              <a:rPr lang="es-MX" b="0" i="0" u="none" strike="noStrike">
                 <a:solidFill>
                   <a:srgbClr val="000000"/>
                 </a:solidFill>
@@ -8601,7 +7816,7 @@
               <a:t>Seleccione el nodo </a:t>
             </a:r>
             <a:r>
-              <a:rPr lang="es-MX" b="1" i="0" u="none" strike="noStrike" dirty="0">
+              <a:rPr lang="es-MX" b="1" i="0" u="none" strike="noStrike">
                 <a:solidFill>
                   <a:srgbClr val="000000"/>
                 </a:solidFill>
@@ -8610,7 +7825,7 @@
               <a:t>Navegador de secuencias </a:t>
             </a:r>
             <a:r>
-              <a:rPr lang="es-MX" b="0" i="0" u="none" strike="noStrike" dirty="0">
+              <a:rPr lang="es-MX" b="0" i="0" u="none" strike="noStrike">
                 <a:solidFill>
                   <a:srgbClr val="000000"/>
                 </a:solidFill>
@@ -8619,7 +7834,7 @@
               <a:t>en la barra de herramientas </a:t>
             </a:r>
             <a:r>
-              <a:rPr lang="es-MX" b="1" i="0" u="none" strike="noStrike" dirty="0">
+              <a:rPr lang="es-MX" b="1" i="0" u="none" strike="noStrike">
                 <a:solidFill>
                   <a:srgbClr val="000000"/>
                 </a:solidFill>
@@ -8628,7 +7843,7 @@
               <a:t>Secuencia</a:t>
             </a:r>
             <a:r>
-              <a:rPr lang="es-MX" b="0" i="0" u="none" strike="noStrike" dirty="0">
+              <a:rPr lang="es-MX" b="0" i="0" u="none" strike="noStrike">
                 <a:solidFill>
                   <a:srgbClr val="000000"/>
                 </a:solidFill>
@@ -8640,7 +7855,7 @@
           <a:p>
             <a:pPr algn="l"/>
             <a:r>
-              <a:rPr lang="es-MX" b="0" i="0" u="none" strike="noStrike" dirty="0">
+              <a:rPr lang="es-MX" b="0" i="0" u="none" strike="noStrike">
                 <a:solidFill>
                   <a:srgbClr val="000000"/>
                 </a:solidFill>
@@ -8649,7 +7864,7 @@
               <a:t>Arrastre el deslizador de </a:t>
             </a:r>
             <a:r>
-              <a:rPr lang="es-MX" b="1" i="0" u="none" strike="noStrike" dirty="0">
+              <a:rPr lang="es-MX" b="1" i="0" u="none" strike="noStrike">
                 <a:solidFill>
                   <a:srgbClr val="000000"/>
                 </a:solidFill>
@@ -8658,7 +7873,7 @@
               <a:t>tiempo</a:t>
             </a:r>
             <a:r>
-              <a:rPr lang="es-MX" b="0" i="0" u="none" strike="noStrike" dirty="0">
+              <a:rPr lang="es-MX" b="0" i="0" u="none" strike="noStrike">
                 <a:solidFill>
                   <a:srgbClr val="000000"/>
                 </a:solidFill>
@@ -8670,7 +7885,7 @@
           <a:p>
             <a:pPr algn="l"/>
             <a:r>
-              <a:rPr lang="es-MX" b="0" i="0" u="none" strike="noStrike" dirty="0">
+              <a:rPr lang="es-MX" b="0" i="0" u="none" strike="noStrike">
                 <a:solidFill>
                   <a:srgbClr val="000000"/>
                 </a:solidFill>
@@ -8682,7 +7897,7 @@
           <a:p>
             <a:pPr algn="l"/>
             <a:r>
-              <a:rPr lang="es-MX" b="0" i="0" u="none" strike="noStrike" dirty="0">
+              <a:rPr lang="es-MX" b="0" i="0" u="none" strike="noStrike">
                 <a:solidFill>
                   <a:srgbClr val="000000"/>
                 </a:solidFill>
@@ -8691,7 +7906,7 @@
               <a:t>Pulse el botón “Colocar desde</a:t>
             </a:r>
             <a:r>
-              <a:rPr lang="es-MX" dirty="0">
+              <a:rPr lang="es-MX">
                 <a:solidFill>
                   <a:srgbClr val="000000"/>
                 </a:solidFill>
@@ -8699,7 +7914,7 @@
               <a:t>”</a:t>
             </a:r>
             <a:r>
-              <a:rPr lang="es-MX" b="0" i="0" u="none" strike="noStrike" dirty="0">
+              <a:rPr lang="es-MX" b="0" i="0" u="none" strike="noStrike">
                 <a:solidFill>
                   <a:srgbClr val="000000"/>
                 </a:solidFill>
@@ -8708,7 +7923,7 @@
               <a:t> para añadir un punto fiducial </a:t>
             </a:r>
             <a:r>
-              <a:rPr lang="es-MX" b="0" i="1" u="none" strike="noStrike" dirty="0">
+              <a:rPr lang="es-MX" b="0" i="1" u="none" strike="noStrike">
                 <a:solidFill>
                   <a:srgbClr val="000000"/>
                 </a:solidFill>
@@ -8717,7 +7932,7 @@
               <a:t>Desde</a:t>
             </a:r>
             <a:r>
-              <a:rPr lang="es-MX" b="0" i="0" u="none" strike="noStrike" dirty="0">
+              <a:rPr lang="es-MX" b="0" i="0" u="none" strike="noStrike">
                 <a:solidFill>
                   <a:srgbClr val="000000"/>
                 </a:solidFill>
@@ -8729,7 +7944,7 @@
           <a:p>
             <a:pPr algn="l"/>
             <a:r>
-              <a:rPr lang="es-MX" b="0" i="0" u="none" strike="noStrike" dirty="0">
+              <a:rPr lang="es-MX" b="0" i="0" u="none" strike="noStrike">
                 <a:solidFill>
                   <a:srgbClr val="000000"/>
                 </a:solidFill>
@@ -8738,7 +7953,7 @@
               <a:t>Pulse el botón selector de fiducial        en la lista </a:t>
             </a:r>
             <a:r>
-              <a:rPr lang="es-MX" dirty="0">
+              <a:rPr lang="es-MX">
                 <a:solidFill>
                   <a:srgbClr val="000000"/>
                 </a:solidFill>
@@ -8746,7 +7961,7 @@
               <a:t>“</a:t>
             </a:r>
             <a:r>
-              <a:rPr lang="es-MX" b="0" i="0" u="none" strike="noStrike" dirty="0">
+              <a:rPr lang="es-MX" b="0" i="0" u="none" strike="noStrike">
                 <a:solidFill>
                   <a:srgbClr val="000000"/>
                 </a:solidFill>
@@ -8758,7 +7973,7 @@
           <a:p>
             <a:pPr algn="l"/>
             <a:r>
-              <a:rPr lang="es-MX" b="0" i="0" u="none" strike="noStrike" dirty="0">
+              <a:rPr lang="es-MX" b="0" i="0" u="none" strike="noStrike">
                 <a:solidFill>
                   <a:srgbClr val="000000"/>
                 </a:solidFill>
@@ -8771,7 +7986,7 @@
             <a:pPr marL="0" indent="0" algn="l">
               <a:buNone/>
             </a:pPr>
-            <a:endParaRPr lang="es-MX" b="0" i="0" u="none" strike="noStrike" dirty="0">
+            <a:endParaRPr lang="es-MX" b="0" i="0" u="none" strike="noStrike">
               <a:solidFill>
                 <a:srgbClr val="000000"/>
               </a:solidFill>
@@ -9363,15 +8578,6 @@
 </file>
 
 <file path=customXml/item1.xml><?xml version="1.0" encoding="utf-8"?>
-<?mso-contentType ?>
-<FormTemplates xmlns="http://schemas.microsoft.com/sharepoint/v3/contenttype/forms">
-  <Display>DocumentLibraryForm</Display>
-  <Edit>DocumentLibraryForm</Edit>
-  <New>DocumentLibraryForm</New>
-</FormTemplates>
-</file>
-
-<file path=customXml/item2.xml><?xml version="1.0" encoding="utf-8"?>
 <p:properties xmlns:p="http://schemas.microsoft.com/office/2006/metadata/properties" xmlns:xsi="http://www.w3.org/2001/XMLSchema-instance" xmlns:pc="http://schemas.microsoft.com/office/infopath/2007/PartnerControls">
   <documentManagement>
     <TaxCatchAll xmlns="098f7cbb-c9e9-450d-82ba-91729ba27895" xsi:nil="true"/>
@@ -9382,9 +8588,18 @@
 </p:properties>
 </file>
 
+<file path=customXml/item2.xml><?xml version="1.0" encoding="utf-8"?>
+<?mso-contentType ?>
+<FormTemplates xmlns="http://schemas.microsoft.com/sharepoint/v3/contenttype/forms">
+  <Display>DocumentLibraryForm</Display>
+  <Edit>DocumentLibraryForm</Edit>
+  <New>DocumentLibraryForm</New>
+</FormTemplates>
+</file>
+
 <file path=customXml/item3.xml><?xml version="1.0" encoding="utf-8"?>
-<ct:contentTypeSchema xmlns:ct="http://schemas.microsoft.com/office/2006/metadata/contentType" xmlns:ma="http://schemas.microsoft.com/office/2006/metadata/properties/metaAttributes" ct:_="" ma:_="" ma:contentTypeName="Document" ma:contentTypeID="0x010100EC4F178DD8AD5D42B7E54A64C7A32259" ma:contentTypeVersion="13" ma:contentTypeDescription="Create a new document." ma:contentTypeScope="" ma:versionID="54b40138b4a9bf238731f94c1d996c9a">
-  <xsd:schema xmlns:xsd="http://www.w3.org/2001/XMLSchema" xmlns:xs="http://www.w3.org/2001/XMLSchema" xmlns:p="http://schemas.microsoft.com/office/2006/metadata/properties" xmlns:ns2="da2f274f-5e6c-4126-98a1-686d90f0b627" xmlns:ns3="098f7cbb-c9e9-450d-82ba-91729ba27895" targetNamespace="http://schemas.microsoft.com/office/2006/metadata/properties" ma:root="true" ma:fieldsID="aa3fc28c7022aeac332799341cfdc5e2" ns2:_="" ns3:_="">
+<ct:contentTypeSchema xmlns:ct="http://schemas.microsoft.com/office/2006/metadata/contentType" xmlns:ma="http://schemas.microsoft.com/office/2006/metadata/properties/metaAttributes" ct:_="" ma:_="" ma:contentTypeName="Document" ma:contentTypeID="0x010100EC4F178DD8AD5D42B7E54A64C7A32259" ma:contentTypeVersion="13" ma:contentTypeDescription="Create a new document." ma:contentTypeScope="" ma:versionID="94ec251bac65f007d594976d1f66ecc6">
+  <xsd:schema xmlns:xsd="http://www.w3.org/2001/XMLSchema" xmlns:xs="http://www.w3.org/2001/XMLSchema" xmlns:p="http://schemas.microsoft.com/office/2006/metadata/properties" xmlns:ns2="da2f274f-5e6c-4126-98a1-686d90f0b627" xmlns:ns3="098f7cbb-c9e9-450d-82ba-91729ba27895" targetNamespace="http://schemas.microsoft.com/office/2006/metadata/properties" ma:root="true" ma:fieldsID="ac1bd02fc6a6cf5ca99f579d85f7d5d7" ns2:_="" ns3:_="">
     <xsd:import namespace="da2f274f-5e6c-4126-98a1-686d90f0b627"/>
     <xsd:import namespace="098f7cbb-c9e9-450d-82ba-91729ba27895"/>
     <xsd:element name="properties">
@@ -9590,6 +8805,17 @@
 </file>
 
 <file path=customXml/itemProps1.xml><?xml version="1.0" encoding="utf-8"?>
+<ds:datastoreItem xmlns:ds="http://schemas.openxmlformats.org/officeDocument/2006/customXml" ds:itemID="{565EE524-C00C-4343-A8F7-7E647C7B3EBA}">
+  <ds:schemaRefs>
+    <ds:schemaRef ds:uri="098f7cbb-c9e9-450d-82ba-91729ba27895"/>
+    <ds:schemaRef ds:uri="da2f274f-5e6c-4126-98a1-686d90f0b627"/>
+    <ds:schemaRef ds:uri="http://schemas.microsoft.com/office/2006/metadata/properties"/>
+    <ds:schemaRef ds:uri="http://schemas.microsoft.com/office/infopath/2007/PartnerControls"/>
+  </ds:schemaRefs>
+</ds:datastoreItem>
+</file>
+
+<file path=customXml/itemProps2.xml><?xml version="1.0" encoding="utf-8"?>
 <ds:datastoreItem xmlns:ds="http://schemas.openxmlformats.org/officeDocument/2006/customXml" ds:itemID="{65A561D3-434B-4EB9-AEB3-6A46892410C6}">
   <ds:schemaRefs>
     <ds:schemaRef ds:uri="http://schemas.microsoft.com/sharepoint/v3/contenttype/forms"/>
@@ -9597,15 +8823,21 @@
 </ds:datastoreItem>
 </file>
 
-<file path=customXml/itemProps2.xml><?xml version="1.0" encoding="utf-8"?>
-<ds:datastoreItem xmlns:ds="http://schemas.openxmlformats.org/officeDocument/2006/customXml" ds:itemID="{565EE524-C00C-4343-A8F7-7E647C7B3EBA}">
+<file path=customXml/itemProps3.xml><?xml version="1.0" encoding="utf-8"?>
+<ds:datastoreItem xmlns:ds="http://schemas.openxmlformats.org/officeDocument/2006/customXml" ds:itemID="{48C050B6-DB09-4460-87CF-6882786AF747}">
   <ds:schemaRefs>
+    <ds:schemaRef ds:uri="098f7cbb-c9e9-450d-82ba-91729ba27895"/>
+    <ds:schemaRef ds:uri="da2f274f-5e6c-4126-98a1-686d90f0b627"/>
+    <ds:schemaRef ds:uri="http://purl.org/dc/elements/1.1/"/>
+    <ds:schemaRef ds:uri="http://purl.org/dc/terms/"/>
+    <ds:schemaRef ds:uri="http://schemas.microsoft.com/internal/obd"/>
+    <ds:schemaRef ds:uri="http://schemas.microsoft.com/office/2006/documentManagement/types"/>
+    <ds:schemaRef ds:uri="http://schemas.microsoft.com/office/2006/metadata/contentType"/>
     <ds:schemaRef ds:uri="http://schemas.microsoft.com/office/2006/metadata/properties"/>
+    <ds:schemaRef ds:uri="http://schemas.microsoft.com/office/2006/metadata/properties/metaAttributes"/>
     <ds:schemaRef ds:uri="http://schemas.microsoft.com/office/infopath/2007/PartnerControls"/>
+    <ds:schemaRef ds:uri="http://schemas.openxmlformats.org/package/2006/metadata/core-properties"/>
+    <ds:schemaRef ds:uri="http://www.w3.org/2001/XMLSchema"/>
   </ds:schemaRefs>
 </ds:datastoreItem>
-</file>
-
-<file path=customXml/itemProps3.xml><?xml version="1.0" encoding="utf-8"?>
-<ds:datastoreItem xmlns:ds="http://schemas.openxmlformats.org/officeDocument/2006/customXml" ds:itemID="{C050387A-565E-4F2F-B41F-C0A9C859A60C}"/>
 </file>